--- a/manu-data-layer/deck/market-map-slide.pptx
+++ b/manu-data-layer/deck/market-map-slide.pptx
@@ -3599,7 +3599,7 @@
                 </a:solidFill>
                 <a:latin typeface="Arial"/>
               </a:rPr>
-              <a:t>A READING FROM A MACHINE TRAVELS DOWN THIS STACK. EVERY LAYER ALREADY HAS AN OWNER — EXCEPT ONE.</a:t>
+              <a:t>NOTHING IS ACTUALLY KEPT UNTIL LAYER 4 — READ THE TAGS DOWN THE RIGHT EDGE</a:t>
             </a:r>
           </a:p>
         </p:txBody>
@@ -3661,7 +3661,7 @@
         <p:spPr>
           <a:xfrm>
             <a:off x="702920" y="1156000"/>
-            <a:ext cx="8200000" cy="174625"/>
+            <a:ext cx="5900000" cy="174625"/>
           </a:xfrm>
           <a:prstGeom prst="rect">
             <a:avLst/>
@@ -3686,7 +3686,7 @@
                 </a:solidFill>
                 <a:latin typeface="Arial"/>
               </a:rPr>
-              <a:t>1 · SENSORS, INSTRUMENTS &amp; EQUIPMENT</a:t>
+              <a:t>1 · SENSORS &amp; INSTRUMENTS</a:t>
             </a:r>
           </a:p>
         </p:txBody>
@@ -3694,6 +3694,45 @@
       <p:sp>
         <p:nvSpPr>
           <p:cNvPr id="6" name="TextBox 5"/>
+          <p:cNvSpPr txBox="1"/>
+          <p:nvPr/>
+        </p:nvSpPr>
+        <p:spPr>
+          <a:xfrm>
+            <a:off x="6602920" y="1178000"/>
+            <a:ext cx="2300000" cy="134937"/>
+          </a:xfrm>
+          <a:prstGeom prst="rect">
+            <a:avLst/>
+          </a:prstGeom>
+          <a:noFill/>
+        </p:spPr>
+        <p:txBody>
+          <a:bodyPr wrap="square" lIns="0" rIns="0" tIns="0" bIns="0" anchor="t">
+            <a:spAutoFit/>
+          </a:bodyPr>
+          <a:lstStyle/>
+          <a:p>
+            <a:pPr algn="r">
+              <a:lnSpc>
+                <a:spcPts val="1105"/>
+              </a:lnSpc>
+            </a:pPr>
+            <a:r>
+              <a:rPr sz="850" b="1" i="1">
+                <a:solidFill>
+                  <a:srgbClr val="2F5D8A"/>
+                </a:solidFill>
+                <a:latin typeface="Arial"/>
+              </a:rPr>
+              <a:t>→  a signal, or nothing</a:t>
+            </a:r>
+          </a:p>
+        </p:txBody>
+      </p:sp>
+      <p:sp>
+        <p:nvSpPr>
+          <p:cNvPr id="7" name="TextBox 6"/>
           <p:cNvSpPr txBox="1"/>
           <p:nvPr/>
         </p:nvSpPr>
@@ -3725,14 +3764,14 @@
                 </a:solidFill>
                 <a:latin typeface="Arial"/>
               </a:rPr>
-              <a:t>Is anything physically measuring it? The equipment maker decides what ships with a sensor.</a:t>
-            </a:r>
-          </a:p>
-        </p:txBody>
-      </p:sp>
-      <p:sp>
-        <p:nvSpPr>
-          <p:cNvPr id="7" name="TextBox 6"/>
+              <a:t>Does a number exist at all? A probe in the tank, a camera over the line — or nothing. Whoever built the line decided this years ago.</a:t>
+            </a:r>
+          </a:p>
+        </p:txBody>
+      </p:sp>
+      <p:sp>
+        <p:nvSpPr>
+          <p:cNvPr id="8" name="TextBox 7"/>
           <p:cNvSpPr txBox="1"/>
           <p:nvPr/>
         </p:nvSpPr>
@@ -3771,7 +3810,7 @@
       </p:sp>
       <p:sp>
         <p:nvSpPr>
-          <p:cNvPr id="8" name="Rounded Rectangle 7"/>
+          <p:cNvPr id="9" name="Rounded Rectangle 8"/>
           <p:cNvSpPr/>
           <p:nvPr/>
         </p:nvSpPr>
@@ -3819,14 +3858,14 @@
       </p:sp>
       <p:sp>
         <p:nvSpPr>
-          <p:cNvPr id="9" name="TextBox 8"/>
+          <p:cNvPr id="10" name="TextBox 9"/>
           <p:cNvSpPr txBox="1"/>
           <p:nvPr/>
         </p:nvSpPr>
         <p:spPr>
           <a:xfrm>
             <a:off x="702920" y="1824000"/>
-            <a:ext cx="8200000" cy="174625"/>
+            <a:ext cx="5900000" cy="174625"/>
           </a:xfrm>
           <a:prstGeom prst="rect">
             <a:avLst/>
@@ -3851,14 +3890,53 @@
                 </a:solidFill>
                 <a:latin typeface="Arial"/>
               </a:rPr>
-              <a:t>2 · CONTROL — the machine’s computer</a:t>
-            </a:r>
-          </a:p>
-        </p:txBody>
-      </p:sp>
-      <p:sp>
-        <p:nvSpPr>
-          <p:cNvPr id="10" name="TextBox 9"/>
+              <a:t>2 · CONTROL</a:t>
+            </a:r>
+          </a:p>
+        </p:txBody>
+      </p:sp>
+      <p:sp>
+        <p:nvSpPr>
+          <p:cNvPr id="11" name="TextBox 10"/>
+          <p:cNvSpPr txBox="1"/>
+          <p:nvPr/>
+        </p:nvSpPr>
+        <p:spPr>
+          <a:xfrm>
+            <a:off x="6602920" y="1846000"/>
+            <a:ext cx="2300000" cy="134937"/>
+          </a:xfrm>
+          <a:prstGeom prst="rect">
+            <a:avLst/>
+          </a:prstGeom>
+          <a:noFill/>
+        </p:spPr>
+        <p:txBody>
+          <a:bodyPr wrap="square" lIns="0" rIns="0" tIns="0" bIns="0" anchor="t">
+            <a:spAutoFit/>
+          </a:bodyPr>
+          <a:lstStyle/>
+          <a:p>
+            <a:pPr algn="r">
+              <a:lnSpc>
+                <a:spcPts val="1105"/>
+              </a:lnSpc>
+            </a:pPr>
+            <a:r>
+              <a:rPr sz="850" b="1" i="1">
+                <a:solidFill>
+                  <a:srgbClr val="2F5D8A"/>
+                </a:solidFill>
+                <a:latin typeface="Arial"/>
+              </a:rPr>
+              <a:t>→  live values, not kept</a:t>
+            </a:r>
+          </a:p>
+        </p:txBody>
+      </p:sp>
+      <p:sp>
+        <p:nvSpPr>
+          <p:cNvPr id="12" name="TextBox 11"/>
           <p:cNvSpPr txBox="1"/>
           <p:nvPr/>
         </p:nvSpPr>
@@ -3890,14 +3968,14 @@
                 </a:solidFill>
                 <a:latin typeface="Arial"/>
               </a:rPr>
-              <a:t>Reads the sensors and drives motors and valves, in milliseconds.</a:t>
-            </a:r>
-          </a:p>
-        </p:txBody>
-      </p:sp>
-      <p:sp>
-        <p:nvSpPr>
-          <p:cNvPr id="11" name="TextBox 10"/>
+              <a:t>The machine’s own computer. Reads the probe and moves the valve thousands of times a second — but it acts on the number, it does not keep it.</a:t>
+            </a:r>
+          </a:p>
+        </p:txBody>
+      </p:sp>
+      <p:sp>
+        <p:nvSpPr>
+          <p:cNvPr id="13" name="TextBox 12"/>
           <p:cNvSpPr txBox="1"/>
           <p:nvPr/>
         </p:nvSpPr>
@@ -3936,7 +4014,7 @@
       </p:sp>
       <p:sp>
         <p:nvSpPr>
-          <p:cNvPr id="12" name="Rounded Rectangle 11"/>
+          <p:cNvPr id="14" name="Rounded Rectangle 13"/>
           <p:cNvSpPr/>
           <p:nvPr/>
         </p:nvSpPr>
@@ -3984,14 +4062,14 @@
       </p:sp>
       <p:sp>
         <p:nvSpPr>
-          <p:cNvPr id="13" name="TextBox 12"/>
+          <p:cNvPr id="15" name="TextBox 14"/>
           <p:cNvSpPr txBox="1"/>
           <p:nvPr/>
         </p:nvSpPr>
         <p:spPr>
           <a:xfrm>
             <a:off x="702920" y="2492000"/>
-            <a:ext cx="8200000" cy="174625"/>
+            <a:ext cx="5900000" cy="174625"/>
           </a:xfrm>
           <a:prstGeom prst="rect">
             <a:avLst/>
@@ -4023,7 +4101,46 @@
       </p:sp>
       <p:sp>
         <p:nvSpPr>
-          <p:cNvPr id="14" name="TextBox 13"/>
+          <p:cNvPr id="16" name="TextBox 15"/>
+          <p:cNvSpPr txBox="1"/>
+          <p:nvPr/>
+        </p:nvSpPr>
+        <p:spPr>
+          <a:xfrm>
+            <a:off x="6602920" y="2514000"/>
+            <a:ext cx="2300000" cy="134937"/>
+          </a:xfrm>
+          <a:prstGeom prst="rect">
+            <a:avLst/>
+          </a:prstGeom>
+          <a:noFill/>
+        </p:spPr>
+        <p:txBody>
+          <a:bodyPr wrap="square" lIns="0" rIns="0" tIns="0" bIns="0" anchor="t">
+            <a:spAutoFit/>
+          </a:bodyPr>
+          <a:lstStyle/>
+          <a:p>
+            <a:pPr algn="r">
+              <a:lnSpc>
+                <a:spcPts val="1105"/>
+              </a:lnSpc>
+            </a:pPr>
+            <a:r>
+              <a:rPr sz="850" b="1" i="1">
+                <a:solidFill>
+                  <a:srgbClr val="2F5D8A"/>
+                </a:solidFill>
+                <a:latin typeface="Arial"/>
+              </a:rPr>
+              <a:t>→  a screen, not a record</a:t>
+            </a:r>
+          </a:p>
+        </p:txBody>
+      </p:sp>
+      <p:sp>
+        <p:nvSpPr>
+          <p:cNvPr id="17" name="TextBox 16"/>
           <p:cNvSpPr txBox="1"/>
           <p:nvPr/>
         </p:nvSpPr>
@@ -4055,14 +4172,14 @@
                 </a:solidFill>
                 <a:latin typeface="Arial"/>
               </a:rPr>
-              <a:t>The live graphics, alarms and start/stop controls on the plant floor.</a:t>
-            </a:r>
-          </a:p>
-        </p:txBody>
-      </p:sp>
-      <p:sp>
-        <p:nvSpPr>
-          <p:cNvPr id="15" name="TextBox 14"/>
+              <a:t>What the operator sees: live graphics, alarms, start and stop. Built for a human watching now, not for a record read later.</a:t>
+            </a:r>
+          </a:p>
+        </p:txBody>
+      </p:sp>
+      <p:sp>
+        <p:nvSpPr>
+          <p:cNvPr id="18" name="TextBox 17"/>
           <p:cNvSpPr txBox="1"/>
           <p:nvPr/>
         </p:nvSpPr>
@@ -4101,7 +4218,7 @@
       </p:sp>
       <p:sp>
         <p:nvSpPr>
-          <p:cNvPr id="16" name="Rounded Rectangle 15"/>
+          <p:cNvPr id="19" name="Rounded Rectangle 18"/>
           <p:cNvSpPr/>
           <p:nvPr/>
         </p:nvSpPr>
@@ -4149,7 +4266,7 @@
       </p:sp>
       <p:sp>
         <p:nvSpPr>
-          <p:cNvPr id="17" name="TextBox 16"/>
+          <p:cNvPr id="20" name="TextBox 19"/>
           <p:cNvSpPr txBox="1"/>
           <p:nvPr/>
         </p:nvSpPr>
@@ -4188,14 +4305,14 @@
       </p:sp>
       <p:sp>
         <p:nvSpPr>
-          <p:cNvPr id="18" name="TextBox 17"/>
+          <p:cNvPr id="21" name="TextBox 20"/>
           <p:cNvSpPr txBox="1"/>
           <p:nvPr/>
         </p:nvSpPr>
         <p:spPr>
           <a:xfrm>
             <a:off x="2442920" y="3168000"/>
-            <a:ext cx="6460000" cy="150812"/>
+            <a:ext cx="4160000" cy="150812"/>
           </a:xfrm>
           <a:prstGeom prst="rect">
             <a:avLst/>
@@ -4227,7 +4344,46 @@
       </p:sp>
       <p:sp>
         <p:nvSpPr>
-          <p:cNvPr id="19" name="TextBox 18"/>
+          <p:cNvPr id="22" name="TextBox 21"/>
+          <p:cNvSpPr txBox="1"/>
+          <p:nvPr/>
+        </p:nvSpPr>
+        <p:spPr>
+          <a:xfrm>
+            <a:off x="6602920" y="3178000"/>
+            <a:ext cx="2300000" cy="134937"/>
+          </a:xfrm>
+          <a:prstGeom prst="rect">
+            <a:avLst/>
+          </a:prstGeom>
+          <a:noFill/>
+        </p:spPr>
+        <p:txBody>
+          <a:bodyPr wrap="square" lIns="0" rIns="0" tIns="0" bIns="0" anchor="t">
+            <a:spAutoFit/>
+          </a:bodyPr>
+          <a:lstStyle/>
+          <a:p>
+            <a:pPr algn="r">
+              <a:lnSpc>
+                <a:spcPts val="1105"/>
+              </a:lnSpc>
+            </a:pPr>
+            <a:r>
+              <a:rPr sz="850" b="1" i="1">
+                <a:solidFill>
+                  <a:srgbClr val="B54F35"/>
+                </a:solidFill>
+                <a:latin typeface="Arial"/>
+              </a:rPr>
+              <a:t>→  a named, storable stream</a:t>
+            </a:r>
+          </a:p>
+        </p:txBody>
+      </p:sp>
+      <p:sp>
+        <p:nvSpPr>
+          <p:cNvPr id="23" name="TextBox 22"/>
           <p:cNvSpPr txBox="1"/>
           <p:nvPr/>
         </p:nvSpPr>
@@ -4259,14 +4415,14 @@
                 </a:solidFill>
                 <a:latin typeface="Arial"/>
               </a:rPr>
-              <a:t>Turns a cryptic machine code such as “N7:0” into something software can read, and routes it onward.</a:t>
-            </a:r>
-          </a:p>
-        </p:txBody>
-      </p:sp>
-      <p:sp>
-        <p:nvSpPr>
-          <p:cNvPr id="20" name="TextBox 19"/>
+              <a:t>Turns a code like “N7:0” into “Mixer 3 temperature”, and sends it somewhere it can be kept.</a:t>
+            </a:r>
+          </a:p>
+        </p:txBody>
+      </p:sp>
+      <p:sp>
+        <p:nvSpPr>
+          <p:cNvPr id="24" name="TextBox 23"/>
           <p:cNvSpPr txBox="1"/>
           <p:nvPr/>
         </p:nvSpPr>
@@ -4305,7 +4461,7 @@
       </p:sp>
       <p:sp>
         <p:nvSpPr>
-          <p:cNvPr id="21" name="TextBox 20"/>
+          <p:cNvPr id="25" name="TextBox 24"/>
           <p:cNvSpPr txBox="1"/>
           <p:nvPr/>
         </p:nvSpPr>
@@ -4344,7 +4500,7 @@
       </p:sp>
       <p:sp>
         <p:nvSpPr>
-          <p:cNvPr id="22" name="TextBox 21"/>
+          <p:cNvPr id="26" name="TextBox 25"/>
           <p:cNvSpPr txBox="1"/>
           <p:nvPr/>
         </p:nvSpPr>
@@ -4383,7 +4539,7 @@
       </p:sp>
       <p:sp>
         <p:nvSpPr>
-          <p:cNvPr id="23" name="Rounded Rectangle 22"/>
+          <p:cNvPr id="27" name="Rounded Rectangle 26"/>
           <p:cNvSpPr/>
           <p:nvPr/>
         </p:nvSpPr>
@@ -4431,14 +4587,14 @@
       </p:sp>
       <p:sp>
         <p:nvSpPr>
-          <p:cNvPr id="24" name="TextBox 23"/>
+          <p:cNvPr id="28" name="TextBox 27"/>
           <p:cNvSpPr txBox="1"/>
           <p:nvPr/>
         </p:nvSpPr>
         <p:spPr>
           <a:xfrm>
             <a:off x="702920" y="4174000"/>
-            <a:ext cx="8200000" cy="174625"/>
+            <a:ext cx="5900000" cy="174625"/>
           </a:xfrm>
           <a:prstGeom prst="rect">
             <a:avLst/>
@@ -4463,14 +4619,53 @@
                 </a:solidFill>
                 <a:latin typeface="Arial"/>
               </a:rPr>
-              <a:t>5 · PLANT RECORDS</a:t>
-            </a:r>
-          </a:p>
-        </p:txBody>
-      </p:sp>
-      <p:sp>
-        <p:nvSpPr>
-          <p:cNvPr id="25" name="TextBox 24"/>
+              <a:t>5 · THE PLANT RECORD</a:t>
+            </a:r>
+          </a:p>
+        </p:txBody>
+      </p:sp>
+      <p:sp>
+        <p:nvSpPr>
+          <p:cNvPr id="29" name="TextBox 28"/>
+          <p:cNvSpPr txBox="1"/>
+          <p:nvPr/>
+        </p:nvSpPr>
+        <p:spPr>
+          <a:xfrm>
+            <a:off x="6602920" y="4196000"/>
+            <a:ext cx="2300000" cy="134937"/>
+          </a:xfrm>
+          <a:prstGeom prst="rect">
+            <a:avLst/>
+          </a:prstGeom>
+          <a:noFill/>
+        </p:spPr>
+        <p:txBody>
+          <a:bodyPr wrap="square" lIns="0" rIns="0" tIns="0" bIns="0" anchor="t">
+            <a:spAutoFit/>
+          </a:bodyPr>
+          <a:lstStyle/>
+          <a:p>
+            <a:pPr algn="r">
+              <a:lnSpc>
+                <a:spcPts val="1105"/>
+              </a:lnSpc>
+            </a:pPr>
+            <a:r>
+              <a:rPr sz="850" b="1" i="1">
+                <a:solidFill>
+                  <a:srgbClr val="2F5D8A"/>
+                </a:solidFill>
+                <a:latin typeface="Arial"/>
+              </a:rPr>
+              <a:t>→  history you can search</a:t>
+            </a:r>
+          </a:p>
+        </p:txBody>
+      </p:sp>
+      <p:sp>
+        <p:nvSpPr>
+          <p:cNvPr id="30" name="TextBox 29"/>
           <p:cNvSpPr txBox="1"/>
           <p:nvPr/>
         </p:nvSpPr>
@@ -4502,14 +4697,14 @@
                 </a:solidFill>
                 <a:latin typeface="Arial"/>
               </a:rPr>
-              <a:t>Stores the readings, and knows what was made, to which recipe, on which order.</a:t>
-            </a:r>
-          </a:p>
-        </p:txBody>
-      </p:sp>
-      <p:sp>
-        <p:nvSpPr>
-          <p:cNvPr id="26" name="TextBox 25"/>
+              <a:t>Keeps the readings, and knows what was being made at the time — which order, which recipe, which lot.</a:t>
+            </a:r>
+          </a:p>
+        </p:txBody>
+      </p:sp>
+      <p:sp>
+        <p:nvSpPr>
+          <p:cNvPr id="31" name="TextBox 30"/>
           <p:cNvSpPr txBox="1"/>
           <p:nvPr/>
         </p:nvSpPr>
@@ -4548,7 +4743,7 @@
       </p:sp>
       <p:sp>
         <p:nvSpPr>
-          <p:cNvPr id="27" name="Rounded Rectangle 26"/>
+          <p:cNvPr id="32" name="Rounded Rectangle 31"/>
           <p:cNvSpPr/>
           <p:nvPr/>
         </p:nvSpPr>
@@ -4596,14 +4791,14 @@
       </p:sp>
       <p:sp>
         <p:nvSpPr>
-          <p:cNvPr id="28" name="TextBox 27"/>
+          <p:cNvPr id="33" name="TextBox 32"/>
           <p:cNvSpPr txBox="1"/>
           <p:nvPr/>
         </p:nvSpPr>
         <p:spPr>
           <a:xfrm>
             <a:off x="702920" y="4842000"/>
-            <a:ext cx="8200000" cy="174625"/>
+            <a:ext cx="5900000" cy="174625"/>
           </a:xfrm>
           <a:prstGeom prst="rect">
             <a:avLst/>
@@ -4635,7 +4830,46 @@
       </p:sp>
       <p:sp>
         <p:nvSpPr>
-          <p:cNvPr id="29" name="TextBox 28"/>
+          <p:cNvPr id="34" name="TextBox 33"/>
+          <p:cNvSpPr txBox="1"/>
+          <p:nvPr/>
+        </p:nvSpPr>
+        <p:spPr>
+          <a:xfrm>
+            <a:off x="6602920" y="4864000"/>
+            <a:ext cx="2300000" cy="134937"/>
+          </a:xfrm>
+          <a:prstGeom prst="rect">
+            <a:avLst/>
+          </a:prstGeom>
+          <a:noFill/>
+        </p:spPr>
+        <p:txBody>
+          <a:bodyPr wrap="square" lIns="0" rIns="0" tIns="0" bIns="0" anchor="t">
+            <a:spAutoFit/>
+          </a:bodyPr>
+          <a:lstStyle/>
+          <a:p>
+            <a:pPr algn="r">
+              <a:lnSpc>
+                <a:spcPts val="1105"/>
+              </a:lnSpc>
+            </a:pPr>
+            <a:r>
+              <a:rPr sz="850" b="1" i="1">
+                <a:solidFill>
+                  <a:srgbClr val="2F5D8A"/>
+                </a:solidFill>
+                <a:latin typeface="Arial"/>
+              </a:rPr>
+              <a:t>→  an answer to act on</a:t>
+            </a:r>
+          </a:p>
+        </p:txBody>
+      </p:sp>
+      <p:sp>
+        <p:nvSpPr>
+          <p:cNvPr id="35" name="TextBox 34"/>
           <p:cNvSpPr txBox="1"/>
           <p:nvPr/>
         </p:nvSpPr>
@@ -4667,14 +4901,14 @@
                 </a:solidFill>
                 <a:latin typeface="Arial"/>
               </a:rPr>
-              <a:t>Predicts failures, explains scrap, optimises yield. What everyone is trying to sell.</a:t>
-            </a:r>
-          </a:p>
-        </p:txBody>
-      </p:sp>
-      <p:sp>
-        <p:nvSpPr>
-          <p:cNvPr id="30" name="TextBox 29"/>
+              <a:t>Turns that history into a prediction, an explanation, or a yield gain. The layer everyone is trying to sell.</a:t>
+            </a:r>
+          </a:p>
+        </p:txBody>
+      </p:sp>
+      <p:sp>
+        <p:nvSpPr>
+          <p:cNvPr id="36" name="TextBox 35"/>
           <p:cNvSpPr txBox="1"/>
           <p:nvPr/>
         </p:nvSpPr>
@@ -4713,7 +4947,7 @@
       </p:sp>
       <p:sp>
         <p:nvSpPr>
-          <p:cNvPr id="31" name="Rounded Rectangle 30"/>
+          <p:cNvPr id="37" name="Rounded Rectangle 36"/>
           <p:cNvSpPr/>
           <p:nvPr/>
         </p:nvSpPr>
@@ -4761,7 +4995,7 @@
       </p:sp>
       <p:sp>
         <p:nvSpPr>
-          <p:cNvPr id="32" name="TextBox 31"/>
+          <p:cNvPr id="38" name="TextBox 37"/>
           <p:cNvSpPr txBox="1"/>
           <p:nvPr/>
         </p:nvSpPr>
@@ -4800,7 +5034,7 @@
       </p:sp>
       <p:sp>
         <p:nvSpPr>
-          <p:cNvPr id="33" name="TextBox 32"/>
+          <p:cNvPr id="39" name="TextBox 38"/>
           <p:cNvSpPr txBox="1"/>
           <p:nvPr/>
         </p:nvSpPr>
@@ -4839,7 +5073,7 @@
       </p:sp>
       <p:sp>
         <p:nvSpPr>
-          <p:cNvPr id="34" name="TextBox 33"/>
+          <p:cNvPr id="40" name="TextBox 39"/>
           <p:cNvSpPr txBox="1"/>
           <p:nvPr/>
         </p:nvSpPr>
@@ -4878,7 +5112,7 @@
       </p:sp>
       <p:sp>
         <p:nvSpPr>
-          <p:cNvPr id="35" name="TextBox 34"/>
+          <p:cNvPr id="41" name="TextBox 40"/>
           <p:cNvSpPr txBox="1"/>
           <p:nvPr/>
         </p:nvSpPr>
@@ -4917,7 +5151,7 @@
       </p:sp>
       <p:sp>
         <p:nvSpPr>
-          <p:cNvPr id="36" name="Rounded Rectangle 35"/>
+          <p:cNvPr id="42" name="Rounded Rectangle 41"/>
           <p:cNvSpPr/>
           <p:nvPr/>
         </p:nvSpPr>
@@ -4965,7 +5199,7 @@
       </p:sp>
       <p:sp>
         <p:nvSpPr>
-          <p:cNvPr id="37" name="TextBox 36"/>
+          <p:cNvPr id="43" name="TextBox 42"/>
           <p:cNvSpPr txBox="1"/>
           <p:nvPr/>
         </p:nvSpPr>
@@ -5004,7 +5238,7 @@
       </p:sp>
       <p:sp>
         <p:nvSpPr>
-          <p:cNvPr id="38" name="TextBox 37"/>
+          <p:cNvPr id="44" name="TextBox 43"/>
           <p:cNvSpPr txBox="1"/>
           <p:nvPr/>
         </p:nvSpPr>
@@ -5043,7 +5277,7 @@
       </p:sp>
       <p:sp>
         <p:nvSpPr>
-          <p:cNvPr id="39" name="TextBox 38"/>
+          <p:cNvPr id="45" name="TextBox 44"/>
           <p:cNvSpPr txBox="1"/>
           <p:nvPr/>
         </p:nvSpPr>
@@ -5082,7 +5316,7 @@
       </p:sp>
       <p:sp>
         <p:nvSpPr>
-          <p:cNvPr id="40" name="TextBox 39"/>
+          <p:cNvPr id="46" name="TextBox 45"/>
           <p:cNvSpPr txBox="1"/>
           <p:nvPr/>
         </p:nvSpPr>
@@ -5121,7 +5355,7 @@
       </p:sp>
       <p:sp>
         <p:nvSpPr>
-          <p:cNvPr id="41" name="Rounded Rectangle 40"/>
+          <p:cNvPr id="47" name="Rounded Rectangle 46"/>
           <p:cNvSpPr/>
           <p:nvPr/>
         </p:nvSpPr>
@@ -5167,7 +5401,7 @@
       </p:sp>
       <p:sp>
         <p:nvSpPr>
-          <p:cNvPr id="42" name="TextBox 41"/>
+          <p:cNvPr id="48" name="TextBox 47"/>
           <p:cNvSpPr txBox="1"/>
           <p:nvPr/>
         </p:nvSpPr>
@@ -5206,7 +5440,7 @@
       </p:sp>
       <p:sp>
         <p:nvSpPr>
-          <p:cNvPr id="43" name="TextBox 42"/>
+          <p:cNvPr id="49" name="TextBox 48"/>
           <p:cNvSpPr txBox="1"/>
           <p:nvPr/>
         </p:nvSpPr>

--- a/manu-data-layer/deck/market-map-slide.pptx
+++ b/manu-data-layer/deck/market-map-slide.pptx
@@ -502,7 +502,7 @@
           <a:lstStyle/>
           <a:p>
             <a:r>
-              <a:t>One-slide market map. Layers 1-6 are the stack; the right column carries the two things a linear chart hides - what gates every layer, and who skips it entirely. Full roster of 163 companies, formal layer definitions and the interaction web are in manu-data-layer/mdl-market-map.md.</a:t>
+              <a:t>Stack rows are mutually exclusive on what a product primarily does to the data. The right column holds systems that own a business obligation and attach at several rows, which is why they are not in the stack. Full roster of 163 companies and formal definitions: manu-data-layer/mdl-market-map.md.</a:t>
             </a:r>
           </a:p>
         </p:txBody>
@@ -3560,7 +3560,7 @@
                 </a:solidFill>
                 <a:latin typeface="Arial"/>
               </a:rPr>
-              <a:t>4.  The manufacturing technology stack — who owns each layer</a:t>
+              <a:t>4.  The manufacturing technology stack — every layer, and who owns it</a:t>
             </a:r>
           </a:p>
         </p:txBody>
@@ -3573,8 +3573,8 @@
         </p:nvSpPr>
         <p:spPr>
           <a:xfrm>
-            <a:off x="502920" y="870000"/>
-            <a:ext cx="8600000" cy="220000"/>
+            <a:off x="502920" y="862000"/>
+            <a:ext cx="8200000" cy="220000"/>
           </a:xfrm>
           <a:prstGeom prst="rect">
             <a:avLst/>
@@ -3599,21 +3599,60 @@
                 </a:solidFill>
                 <a:latin typeface="Arial"/>
               </a:rPr>
-              <a:t>NOTHING IS ACTUALLY KEPT UNTIL LAYER 4 — READ THE TAGS DOWN THE RIGHT EDGE</a:t>
-            </a:r>
-          </a:p>
-        </p:txBody>
-      </p:sp>
-      <p:sp>
-        <p:nvSpPr>
-          <p:cNvPr id="4" name="Rounded Rectangle 3"/>
+              <a:t>ONE ROW PER THING THAT HAPPENS TO THE DATA. A PRODUCT SITS IN THE ROW IT PRIMARILY DOES.</a:t>
+            </a:r>
+          </a:p>
+        </p:txBody>
+      </p:sp>
+      <p:sp>
+        <p:nvSpPr>
+          <p:cNvPr id="4" name="TextBox 3"/>
+          <p:cNvSpPr txBox="1"/>
+          <p:nvPr/>
+        </p:nvSpPr>
+        <p:spPr>
+          <a:xfrm>
+            <a:off x="8882920" y="862000"/>
+            <a:ext cx="2806160" cy="220000"/>
+          </a:xfrm>
+          <a:prstGeom prst="rect">
+            <a:avLst/>
+          </a:prstGeom>
+          <a:noFill/>
+        </p:spPr>
+        <p:txBody>
+          <a:bodyPr wrap="square" lIns="0" rIns="0" tIns="0" bIns="0" anchor="t">
+            <a:spAutoFit/>
+          </a:bodyPr>
+          <a:lstStyle/>
+          <a:p>
+            <a:pPr algn="l">
+              <a:lnSpc>
+                <a:spcPts val="1430"/>
+              </a:lnSpc>
+            </a:pPr>
+            <a:r>
+              <a:rPr sz="1100" b="1" i="0">
+                <a:solidFill>
+                  <a:srgbClr val="2D6E63"/>
+                </a:solidFill>
+                <a:latin typeface="Arial"/>
+              </a:rPr>
+              <a:t>ATTACH AT SEVERAL ROWS</a:t>
+            </a:r>
+          </a:p>
+        </p:txBody>
+      </p:sp>
+      <p:sp>
+        <p:nvSpPr>
+          <p:cNvPr id="5" name="Rounded Rectangle 4"/>
           <p:cNvSpPr/>
           <p:nvPr/>
         </p:nvSpPr>
         <p:spPr>
           <a:xfrm>
-            <a:off x="502920" y="1080000"/>
-            <a:ext cx="8600000" cy="622000"/>
+            <a:off x="502920" y="1060000"/>
+            <a:ext cx="8200000" cy="525000"/>
           </a:xfrm>
           <a:prstGeom prst="roundRect">
             <a:avLst>
@@ -3654,14 +3693,14 @@
       </p:sp>
       <p:sp>
         <p:nvSpPr>
-          <p:cNvPr id="5" name="TextBox 4"/>
+          <p:cNvPr id="6" name="TextBox 5"/>
           <p:cNvSpPr txBox="1"/>
           <p:nvPr/>
         </p:nvSpPr>
         <p:spPr>
           <a:xfrm>
-            <a:off x="702920" y="1156000"/>
-            <a:ext cx="5900000" cy="174625"/>
+            <a:off x="692920" y="1116000"/>
+            <a:ext cx="5370000" cy="162687"/>
           </a:xfrm>
           <a:prstGeom prst="rect">
             <a:avLst/>
@@ -3676,31 +3715,31 @@
           <a:p>
             <a:pPr algn="l">
               <a:lnSpc>
-                <a:spcPts val="1430"/>
+                <a:spcPts val="1365"/>
               </a:lnSpc>
             </a:pPr>
             <a:r>
-              <a:rPr sz="1100" b="1" i="0">
+              <a:rPr sz="1050" b="1" i="0">
                 <a:solidFill>
                   <a:srgbClr val="222A35"/>
                 </a:solidFill>
                 <a:latin typeface="Arial"/>
               </a:rPr>
-              <a:t>1 · SENSORS &amp; INSTRUMENTS</a:t>
-            </a:r>
-          </a:p>
-        </p:txBody>
-      </p:sp>
-      <p:sp>
-        <p:nvSpPr>
-          <p:cNvPr id="6" name="TextBox 5"/>
+              <a:t>1 · SENSE</a:t>
+            </a:r>
+          </a:p>
+        </p:txBody>
+      </p:sp>
+      <p:sp>
+        <p:nvSpPr>
+          <p:cNvPr id="7" name="TextBox 6"/>
           <p:cNvSpPr txBox="1"/>
           <p:nvPr/>
         </p:nvSpPr>
         <p:spPr>
           <a:xfrm>
-            <a:off x="6602920" y="1178000"/>
-            <a:ext cx="2300000" cy="134937"/>
+            <a:off x="6062920" y="1130000"/>
+            <a:ext cx="2450000" cy="123952"/>
           </a:xfrm>
           <a:prstGeom prst="rect">
             <a:avLst/>
@@ -3715,31 +3754,31 @@
           <a:p>
             <a:pPr algn="r">
               <a:lnSpc>
-                <a:spcPts val="1105"/>
+                <a:spcPts val="1040"/>
               </a:lnSpc>
             </a:pPr>
             <a:r>
-              <a:rPr sz="850" b="1" i="1">
+              <a:rPr sz="800" b="1" i="1">
                 <a:solidFill>
                   <a:srgbClr val="2F5D8A"/>
                 </a:solidFill>
                 <a:latin typeface="Arial"/>
               </a:rPr>
-              <a:t>→  a signal, or nothing</a:t>
-            </a:r>
-          </a:p>
-        </p:txBody>
-      </p:sp>
-      <p:sp>
-        <p:nvSpPr>
-          <p:cNvPr id="7" name="TextBox 6"/>
+              <a:t>→  a reading exists</a:t>
+            </a:r>
+          </a:p>
+        </p:txBody>
+      </p:sp>
+      <p:sp>
+        <p:nvSpPr>
+          <p:cNvPr id="8" name="TextBox 7"/>
           <p:cNvSpPr txBox="1"/>
           <p:nvPr/>
         </p:nvSpPr>
         <p:spPr>
           <a:xfrm>
-            <a:off x="702920" y="1344625"/>
-            <a:ext cx="8200000" cy="134937"/>
+            <a:off x="692920" y="1288687"/>
+            <a:ext cx="7820000" cy="123952"/>
           </a:xfrm>
           <a:prstGeom prst="rect">
             <a:avLst/>
@@ -3754,31 +3793,31 @@
           <a:p>
             <a:pPr algn="l">
               <a:lnSpc>
-                <a:spcPts val="1105"/>
+                <a:spcPts val="1040"/>
               </a:lnSpc>
             </a:pPr>
             <a:r>
-              <a:rPr sz="850" b="0" i="1">
+              <a:rPr sz="800" b="0" i="1">
                 <a:solidFill>
                   <a:srgbClr val="5A6570"/>
                 </a:solidFill>
                 <a:latin typeface="Arial"/>
               </a:rPr>
-              <a:t>Does a number exist at all? A probe in the tank, a camera over the line — or nothing. Whoever built the line decided this years ago.</a:t>
-            </a:r>
-          </a:p>
-        </p:txBody>
-      </p:sp>
-      <p:sp>
-        <p:nvSpPr>
-          <p:cNvPr id="8" name="TextBox 7"/>
+              <a:t>Creates the number in the first place — a probe, a camera, or a person writing it down.</a:t>
+            </a:r>
+          </a:p>
+        </p:txBody>
+      </p:sp>
+      <p:sp>
+        <p:nvSpPr>
+          <p:cNvPr id="9" name="TextBox 8"/>
           <p:cNvSpPr txBox="1"/>
           <p:nvPr/>
         </p:nvSpPr>
         <p:spPr>
           <a:xfrm>
-            <a:off x="702920" y="1491562"/>
-            <a:ext cx="8200000" cy="134937"/>
+            <a:off x="692920" y="1420639"/>
+            <a:ext cx="7820000" cy="123952"/>
           </a:xfrm>
           <a:prstGeom prst="rect">
             <a:avLst/>
@@ -3793,31 +3832,31 @@
           <a:p>
             <a:pPr algn="l">
               <a:lnSpc>
-                <a:spcPts val="1105"/>
+                <a:spcPts val="1040"/>
               </a:lnSpc>
             </a:pPr>
             <a:r>
-              <a:rPr sz="850" b="0" i="0">
+              <a:rPr sz="800" b="0" i="0">
                 <a:solidFill>
                   <a:srgbClr val="1A1A1A"/>
                 </a:solidFill>
                 <a:latin typeface="Arial"/>
               </a:rPr>
-              <a:t>Emerson Rosemount · Anderson-Negele · Endress+Hauser · Cognex · Keyence  |  Groen · Lee · Admix (equipment)  |  Partlow (paper charts)</a:t>
-            </a:r>
-          </a:p>
-        </p:txBody>
-      </p:sp>
-      <p:sp>
-        <p:nvSpPr>
-          <p:cNvPr id="9" name="Rounded Rectangle 8"/>
+              <a:t>Emerson Rosemount · Anderson-Negele · Endress+Hauser · Cognex · Keyence · Augury (fits its own) · Partlow (paper charts)</a:t>
+            </a:r>
+          </a:p>
+        </p:txBody>
+      </p:sp>
+      <p:sp>
+        <p:nvSpPr>
+          <p:cNvPr id="10" name="Rounded Rectangle 9"/>
           <p:cNvSpPr/>
           <p:nvPr/>
         </p:nvSpPr>
         <p:spPr>
           <a:xfrm>
-            <a:off x="502920" y="1748000"/>
-            <a:ext cx="8600000" cy="622000"/>
+            <a:off x="502920" y="1615000"/>
+            <a:ext cx="8200000" cy="525000"/>
           </a:xfrm>
           <a:prstGeom prst="roundRect">
             <a:avLst>
@@ -3858,14 +3897,14 @@
       </p:sp>
       <p:sp>
         <p:nvSpPr>
-          <p:cNvPr id="10" name="TextBox 9"/>
+          <p:cNvPr id="11" name="TextBox 10"/>
           <p:cNvSpPr txBox="1"/>
           <p:nvPr/>
         </p:nvSpPr>
         <p:spPr>
           <a:xfrm>
-            <a:off x="702920" y="1824000"/>
-            <a:ext cx="5900000" cy="174625"/>
+            <a:off x="692920" y="1671000"/>
+            <a:ext cx="5370000" cy="162687"/>
           </a:xfrm>
           <a:prstGeom prst="rect">
             <a:avLst/>
@@ -3880,11 +3919,11 @@
           <a:p>
             <a:pPr algn="l">
               <a:lnSpc>
-                <a:spcPts val="1430"/>
+                <a:spcPts val="1365"/>
               </a:lnSpc>
             </a:pPr>
             <a:r>
-              <a:rPr sz="1100" b="1" i="0">
+              <a:rPr sz="1050" b="1" i="0">
                 <a:solidFill>
                   <a:srgbClr val="222A35"/>
                 </a:solidFill>
@@ -3897,14 +3936,14 @@
       </p:sp>
       <p:sp>
         <p:nvSpPr>
-          <p:cNvPr id="11" name="TextBox 10"/>
+          <p:cNvPr id="12" name="TextBox 11"/>
           <p:cNvSpPr txBox="1"/>
           <p:nvPr/>
         </p:nvSpPr>
         <p:spPr>
           <a:xfrm>
-            <a:off x="6602920" y="1846000"/>
-            <a:ext cx="2300000" cy="134937"/>
+            <a:off x="6062920" y="1685000"/>
+            <a:ext cx="2450000" cy="123952"/>
           </a:xfrm>
           <a:prstGeom prst="rect">
             <a:avLst/>
@@ -3919,31 +3958,31 @@
           <a:p>
             <a:pPr algn="r">
               <a:lnSpc>
-                <a:spcPts val="1105"/>
+                <a:spcPts val="1040"/>
               </a:lnSpc>
             </a:pPr>
             <a:r>
-              <a:rPr sz="850" b="1" i="1">
+              <a:rPr sz="800" b="1" i="1">
                 <a:solidFill>
                   <a:srgbClr val="2F5D8A"/>
                 </a:solidFill>
                 <a:latin typeface="Arial"/>
               </a:rPr>
-              <a:t>→  live values, not kept</a:t>
-            </a:r>
-          </a:p>
-        </p:txBody>
-      </p:sp>
-      <p:sp>
-        <p:nvSpPr>
-          <p:cNvPr id="12" name="TextBox 11"/>
+              <a:t>→  action, nothing stored</a:t>
+            </a:r>
+          </a:p>
+        </p:txBody>
+      </p:sp>
+      <p:sp>
+        <p:nvSpPr>
+          <p:cNvPr id="13" name="TextBox 12"/>
           <p:cNvSpPr txBox="1"/>
           <p:nvPr/>
         </p:nvSpPr>
         <p:spPr>
           <a:xfrm>
-            <a:off x="702920" y="2012625"/>
-            <a:ext cx="8200000" cy="134937"/>
+            <a:off x="692920" y="1843687"/>
+            <a:ext cx="7820000" cy="123952"/>
           </a:xfrm>
           <a:prstGeom prst="rect">
             <a:avLst/>
@@ -3958,31 +3997,31 @@
           <a:p>
             <a:pPr algn="l">
               <a:lnSpc>
-                <a:spcPts val="1105"/>
+                <a:spcPts val="1040"/>
               </a:lnSpc>
             </a:pPr>
             <a:r>
-              <a:rPr sz="850" b="0" i="1">
+              <a:rPr sz="800" b="0" i="1">
                 <a:solidFill>
                   <a:srgbClr val="5A6570"/>
                 </a:solidFill>
                 <a:latin typeface="Arial"/>
               </a:rPr>
-              <a:t>The machine’s own computer. Reads the probe and moves the valve thousands of times a second — but it acts on the number, it does not keep it.</a:t>
-            </a:r>
-          </a:p>
-        </p:txBody>
-      </p:sp>
-      <p:sp>
-        <p:nvSpPr>
-          <p:cNvPr id="13" name="TextBox 12"/>
+              <a:t>Acts on the number in milliseconds to move a valve or a motor. It does not keep it.</a:t>
+            </a:r>
+          </a:p>
+        </p:txBody>
+      </p:sp>
+      <p:sp>
+        <p:nvSpPr>
+          <p:cNvPr id="14" name="TextBox 13"/>
           <p:cNvSpPr txBox="1"/>
           <p:nvPr/>
         </p:nvSpPr>
         <p:spPr>
           <a:xfrm>
-            <a:off x="702920" y="2159562"/>
-            <a:ext cx="8200000" cy="134937"/>
+            <a:off x="692920" y="1975639"/>
+            <a:ext cx="7820000" cy="123952"/>
           </a:xfrm>
           <a:prstGeom prst="rect">
             <a:avLst/>
@@ -3997,31 +4036,31 @@
           <a:p>
             <a:pPr algn="l">
               <a:lnSpc>
-                <a:spcPts val="1105"/>
+                <a:spcPts val="1040"/>
               </a:lnSpc>
             </a:pPr>
             <a:r>
-              <a:rPr sz="850" b="0" i="0">
+              <a:rPr sz="800" b="0" i="0">
                 <a:solidFill>
                   <a:srgbClr val="1A1A1A"/>
                 </a:solidFill>
                 <a:latin typeface="Arial"/>
               </a:rPr>
-              <a:t>Rockwell Allen-Bradley · Siemens SIMATIC · Emerson DeltaV · Schneider Modicon · ABB · Beckhoff · Mitsubishi · Omron · Yokogawa</a:t>
-            </a:r>
-          </a:p>
-        </p:txBody>
-      </p:sp>
-      <p:sp>
-        <p:nvSpPr>
-          <p:cNvPr id="14" name="Rounded Rectangle 13"/>
+              <a:t>Rockwell Allen-Bradley · Siemens SIMATIC · Emerson DeltaV · Schneider Modicon · ABB · Beckhoff · Omron · Yokogawa</a:t>
+            </a:r>
+          </a:p>
+        </p:txBody>
+      </p:sp>
+      <p:sp>
+        <p:nvSpPr>
+          <p:cNvPr id="15" name="Rounded Rectangle 14"/>
           <p:cNvSpPr/>
           <p:nvPr/>
         </p:nvSpPr>
         <p:spPr>
           <a:xfrm>
-            <a:off x="502920" y="2416000"/>
-            <a:ext cx="8600000" cy="622000"/>
+            <a:off x="502920" y="2170000"/>
+            <a:ext cx="8200000" cy="525000"/>
           </a:xfrm>
           <a:prstGeom prst="roundRect">
             <a:avLst>
@@ -4062,14 +4101,14 @@
       </p:sp>
       <p:sp>
         <p:nvSpPr>
-          <p:cNvPr id="15" name="TextBox 14"/>
+          <p:cNvPr id="16" name="TextBox 15"/>
           <p:cNvSpPr txBox="1"/>
           <p:nvPr/>
         </p:nvSpPr>
         <p:spPr>
           <a:xfrm>
-            <a:off x="702920" y="2492000"/>
-            <a:ext cx="5900000" cy="174625"/>
+            <a:off x="692920" y="2226000"/>
+            <a:ext cx="5370000" cy="162687"/>
           </a:xfrm>
           <a:prstGeom prst="rect">
             <a:avLst/>
@@ -4084,31 +4123,31 @@
           <a:p>
             <a:pPr algn="l">
               <a:lnSpc>
-                <a:spcPts val="1430"/>
+                <a:spcPts val="1365"/>
               </a:lnSpc>
             </a:pPr>
             <a:r>
-              <a:rPr sz="1100" b="1" i="0">
+              <a:rPr sz="1050" b="1" i="0">
                 <a:solidFill>
                   <a:srgbClr val="222A35"/>
                 </a:solidFill>
                 <a:latin typeface="Arial"/>
               </a:rPr>
-              <a:t>3 · OPERATOR SCREENS</a:t>
-            </a:r>
-          </a:p>
-        </p:txBody>
-      </p:sp>
-      <p:sp>
-        <p:nvSpPr>
-          <p:cNvPr id="16" name="TextBox 15"/>
+              <a:t>3 · SUPERVISE</a:t>
+            </a:r>
+          </a:p>
+        </p:txBody>
+      </p:sp>
+      <p:sp>
+        <p:nvSpPr>
+          <p:cNvPr id="17" name="TextBox 16"/>
           <p:cNvSpPr txBox="1"/>
           <p:nvPr/>
         </p:nvSpPr>
         <p:spPr>
           <a:xfrm>
-            <a:off x="6602920" y="2514000"/>
-            <a:ext cx="2300000" cy="134937"/>
+            <a:off x="6062920" y="2240000"/>
+            <a:ext cx="2450000" cy="123952"/>
           </a:xfrm>
           <a:prstGeom prst="rect">
             <a:avLst/>
@@ -4123,31 +4162,31 @@
           <a:p>
             <a:pPr algn="r">
               <a:lnSpc>
-                <a:spcPts val="1105"/>
+                <a:spcPts val="1040"/>
               </a:lnSpc>
             </a:pPr>
             <a:r>
-              <a:rPr sz="850" b="1" i="1">
+              <a:rPr sz="800" b="1" i="1">
                 <a:solidFill>
                   <a:srgbClr val="2F5D8A"/>
                 </a:solidFill>
                 <a:latin typeface="Arial"/>
               </a:rPr>
-              <a:t>→  a screen, not a record</a:t>
-            </a:r>
-          </a:p>
-        </p:txBody>
-      </p:sp>
-      <p:sp>
-        <p:nvSpPr>
-          <p:cNvPr id="17" name="TextBox 16"/>
+              <a:t>→  a live screen</a:t>
+            </a:r>
+          </a:p>
+        </p:txBody>
+      </p:sp>
+      <p:sp>
+        <p:nvSpPr>
+          <p:cNvPr id="18" name="TextBox 17"/>
           <p:cNvSpPr txBox="1"/>
           <p:nvPr/>
         </p:nvSpPr>
         <p:spPr>
           <a:xfrm>
-            <a:off x="702920" y="2680625"/>
-            <a:ext cx="8200000" cy="134937"/>
+            <a:off x="692920" y="2398687"/>
+            <a:ext cx="7820000" cy="123952"/>
           </a:xfrm>
           <a:prstGeom prst="rect">
             <a:avLst/>
@@ -4162,31 +4201,31 @@
           <a:p>
             <a:pPr algn="l">
               <a:lnSpc>
-                <a:spcPts val="1105"/>
+                <a:spcPts val="1040"/>
               </a:lnSpc>
             </a:pPr>
             <a:r>
-              <a:rPr sz="850" b="0" i="1">
+              <a:rPr sz="800" b="0" i="1">
                 <a:solidFill>
                   <a:srgbClr val="5A6570"/>
                 </a:solidFill>
                 <a:latin typeface="Arial"/>
               </a:rPr>
-              <a:t>What the operator sees: live graphics, alarms, start and stop. Built for a human watching now, not for a record read later.</a:t>
-            </a:r>
-          </a:p>
-        </p:txBody>
-      </p:sp>
-      <p:sp>
-        <p:nvSpPr>
-          <p:cNvPr id="18" name="TextBox 17"/>
+              <a:t>Shows a human what is happening right now: graphics, alarms, start and stop.</a:t>
+            </a:r>
+          </a:p>
+        </p:txBody>
+      </p:sp>
+      <p:sp>
+        <p:nvSpPr>
+          <p:cNvPr id="19" name="TextBox 18"/>
           <p:cNvSpPr txBox="1"/>
           <p:nvPr/>
         </p:nvSpPr>
         <p:spPr>
           <a:xfrm>
-            <a:off x="702920" y="2827562"/>
-            <a:ext cx="8200000" cy="134937"/>
+            <a:off x="692920" y="2530639"/>
+            <a:ext cx="7820000" cy="123952"/>
           </a:xfrm>
           <a:prstGeom prst="rect">
             <a:avLst/>
@@ -4201,11 +4240,11 @@
           <a:p>
             <a:pPr algn="l">
               <a:lnSpc>
-                <a:spcPts val="1105"/>
+                <a:spcPts val="1040"/>
               </a:lnSpc>
             </a:pPr>
             <a:r>
-              <a:rPr sz="850" b="0" i="0">
+              <a:rPr sz="800" b="0" i="0">
                 <a:solidFill>
                   <a:srgbClr val="1A1A1A"/>
                 </a:solidFill>
@@ -4218,14 +4257,14 @@
       </p:sp>
       <p:sp>
         <p:nvSpPr>
-          <p:cNvPr id="19" name="Rounded Rectangle 18"/>
+          <p:cNvPr id="20" name="Rounded Rectangle 19"/>
           <p:cNvSpPr/>
           <p:nvPr/>
         </p:nvSpPr>
         <p:spPr>
           <a:xfrm>
-            <a:off x="502920" y="3084000"/>
-            <a:ext cx="8600000" cy="968000"/>
+            <a:off x="502920" y="2725000"/>
+            <a:ext cx="8200000" cy="525000"/>
           </a:xfrm>
           <a:prstGeom prst="roundRect">
             <a:avLst>
@@ -4235,7 +4274,7 @@
           <a:solidFill>
             <a:srgbClr val="FAECE8"/>
           </a:solidFill>
-          <a:ln w="25400">
+          <a:ln w="22225">
             <a:solidFill>
               <a:srgbClr val="B54F35"/>
             </a:solidFill>
@@ -4266,14 +4305,14 @@
       </p:sp>
       <p:sp>
         <p:nvSpPr>
-          <p:cNvPr id="20" name="TextBox 19"/>
+          <p:cNvPr id="21" name="TextBox 20"/>
           <p:cNvSpPr txBox="1"/>
           <p:nvPr/>
         </p:nvSpPr>
         <p:spPr>
           <a:xfrm>
-            <a:off x="702920" y="3156000"/>
-            <a:ext cx="1700000" cy="182562"/>
+            <a:off x="692920" y="2781000"/>
+            <a:ext cx="5370000" cy="162687"/>
           </a:xfrm>
           <a:prstGeom prst="rect">
             <a:avLst/>
@@ -4288,31 +4327,31 @@
           <a:p>
             <a:pPr algn="l">
               <a:lnSpc>
-                <a:spcPts val="1495"/>
+                <a:spcPts val="1365"/>
               </a:lnSpc>
             </a:pPr>
             <a:r>
-              <a:rPr sz="1150" b="1" i="0">
+              <a:rPr sz="1050" b="1" i="0">
                 <a:solidFill>
                   <a:srgbClr val="B54F35"/>
                 </a:solidFill>
                 <a:latin typeface="Arial"/>
               </a:rPr>
-              <a:t>4 · DATA TRANSLATION</a:t>
-            </a:r>
-          </a:p>
-        </p:txBody>
-      </p:sp>
-      <p:sp>
-        <p:nvSpPr>
-          <p:cNvPr id="21" name="TextBox 20"/>
+              <a:t>4 · MOVE</a:t>
+            </a:r>
+          </a:p>
+        </p:txBody>
+      </p:sp>
+      <p:sp>
+        <p:nvSpPr>
+          <p:cNvPr id="22" name="TextBox 21"/>
           <p:cNvSpPr txBox="1"/>
           <p:nvPr/>
         </p:nvSpPr>
         <p:spPr>
           <a:xfrm>
-            <a:off x="2442920" y="3168000"/>
-            <a:ext cx="4160000" cy="150812"/>
+            <a:off x="6062920" y="2795000"/>
+            <a:ext cx="2450000" cy="123952"/>
           </a:xfrm>
           <a:prstGeom prst="rect">
             <a:avLst/>
@@ -4325,33 +4364,33 @@
           </a:bodyPr>
           <a:lstStyle/>
           <a:p>
-            <a:pPr algn="l">
+            <a:pPr algn="r">
               <a:lnSpc>
-                <a:spcPts val="1235"/>
+                <a:spcPts val="1040"/>
               </a:lnSpc>
             </a:pPr>
             <a:r>
-              <a:rPr sz="950" b="1" i="1">
+              <a:rPr sz="800" b="1" i="1">
                 <a:solidFill>
                   <a:srgbClr val="B54F35"/>
                 </a:solidFill>
                 <a:latin typeface="Arial"/>
               </a:rPr>
-              <a:t>←  where this project is aimed</a:t>
-            </a:r>
-          </a:p>
-        </p:txBody>
-      </p:sp>
-      <p:sp>
-        <p:nvSpPr>
-          <p:cNvPr id="22" name="TextBox 21"/>
+              <a:t>→  a named stream</a:t>
+            </a:r>
+          </a:p>
+        </p:txBody>
+      </p:sp>
+      <p:sp>
+        <p:nvSpPr>
+          <p:cNvPr id="23" name="TextBox 22"/>
           <p:cNvSpPr txBox="1"/>
           <p:nvPr/>
         </p:nvSpPr>
         <p:spPr>
           <a:xfrm>
-            <a:off x="6602920" y="3178000"/>
-            <a:ext cx="2300000" cy="134937"/>
+            <a:off x="692920" y="2953687"/>
+            <a:ext cx="7820000" cy="123952"/>
           </a:xfrm>
           <a:prstGeom prst="rect">
             <a:avLst/>
@@ -4364,58 +4403,19 @@
           </a:bodyPr>
           <a:lstStyle/>
           <a:p>
-            <a:pPr algn="r">
+            <a:pPr algn="l">
               <a:lnSpc>
-                <a:spcPts val="1105"/>
+                <a:spcPts val="1040"/>
               </a:lnSpc>
             </a:pPr>
             <a:r>
-              <a:rPr sz="850" b="1" i="1">
-                <a:solidFill>
-                  <a:srgbClr val="B54F35"/>
-                </a:solidFill>
-                <a:latin typeface="Arial"/>
-              </a:rPr>
-              <a:t>→  a named, storable stream</a:t>
-            </a:r>
-          </a:p>
-        </p:txBody>
-      </p:sp>
-      <p:sp>
-        <p:nvSpPr>
-          <p:cNvPr id="23" name="TextBox 22"/>
-          <p:cNvSpPr txBox="1"/>
-          <p:nvPr/>
-        </p:nvSpPr>
-        <p:spPr>
-          <a:xfrm>
-            <a:off x="702920" y="3354562"/>
-            <a:ext cx="8200000" cy="134937"/>
-          </a:xfrm>
-          <a:prstGeom prst="rect">
-            <a:avLst/>
-          </a:prstGeom>
-          <a:noFill/>
-        </p:spPr>
-        <p:txBody>
-          <a:bodyPr wrap="square" lIns="0" rIns="0" tIns="0" bIns="0" anchor="t">
-            <a:spAutoFit/>
-          </a:bodyPr>
-          <a:lstStyle/>
-          <a:p>
-            <a:pPr algn="l">
-              <a:lnSpc>
-                <a:spcPts val="1105"/>
-              </a:lnSpc>
-            </a:pPr>
-            <a:r>
-              <a:rPr sz="850" b="0" i="1">
+              <a:rPr sz="800" b="0" i="1">
                 <a:solidFill>
                   <a:srgbClr val="5A6570"/>
                 </a:solidFill>
                 <a:latin typeface="Arial"/>
               </a:rPr>
-              <a:t>Turns a code like “N7:0” into “Mixer 3 temperature”, and sends it somewhere it can be kept.</a:t>
+              <a:t>Translates cryptic machine codes and routes them off the floor. Getting bits out is solved.</a:t>
             </a:r>
           </a:p>
         </p:txBody>
@@ -4428,8 +4428,8 @@
         </p:nvSpPr>
         <p:spPr>
           <a:xfrm>
-            <a:off x="702920" y="3499499"/>
-            <a:ext cx="8200000" cy="134937"/>
+            <a:off x="692920" y="3085639"/>
+            <a:ext cx="7820000" cy="123952"/>
           </a:xfrm>
           <a:prstGeom prst="rect">
             <a:avLst/>
@@ -4444,11 +4444,11 @@
           <a:p>
             <a:pPr algn="l">
               <a:lnSpc>
-                <a:spcPts val="1105"/>
+                <a:spcPts val="1040"/>
               </a:lnSpc>
             </a:pPr>
             <a:r>
-              <a:rPr sz="850" b="0" i="0">
+              <a:rPr sz="800" b="0" i="0">
                 <a:solidFill>
                   <a:srgbClr val="1A1A1A"/>
                 </a:solidFill>
@@ -4461,92 +4461,14 @@
       </p:sp>
       <p:sp>
         <p:nvSpPr>
-          <p:cNvPr id="25" name="TextBox 24"/>
-          <p:cNvSpPr txBox="1"/>
-          <p:nvPr/>
-        </p:nvSpPr>
-        <p:spPr>
-          <a:xfrm>
-            <a:off x="702920" y="3658436"/>
-            <a:ext cx="8200000" cy="134937"/>
-          </a:xfrm>
-          <a:prstGeom prst="rect">
-            <a:avLst/>
-          </a:prstGeom>
-          <a:noFill/>
-        </p:spPr>
-        <p:txBody>
-          <a:bodyPr wrap="square" lIns="0" rIns="0" tIns="0" bIns="0" anchor="t">
-            <a:spAutoFit/>
-          </a:bodyPr>
-          <a:lstStyle/>
-          <a:p>
-            <a:pPr algn="l">
-              <a:lnSpc>
-                <a:spcPts val="1105"/>
-              </a:lnSpc>
-            </a:pPr>
-            <a:r>
-              <a:rPr sz="850" b="1" i="0">
-                <a:solidFill>
-                  <a:srgbClr val="2D6E63"/>
-                </a:solidFill>
-                <a:latin typeface="Arial"/>
-              </a:rPr>
-              <a:t>SOLVED — getting the bits off the machine. Litmus ships 250+ drivers; Kepware translates almost any protocol.</a:t>
-            </a:r>
-          </a:p>
-        </p:txBody>
-      </p:sp>
-      <p:sp>
-        <p:nvSpPr>
-          <p:cNvPr id="26" name="TextBox 25"/>
-          <p:cNvSpPr txBox="1"/>
-          <p:nvPr/>
-        </p:nvSpPr>
-        <p:spPr>
-          <a:xfrm>
-            <a:off x="702920" y="3803373"/>
-            <a:ext cx="8200000" cy="134937"/>
-          </a:xfrm>
-          <a:prstGeom prst="rect">
-            <a:avLst/>
-          </a:prstGeom>
-          <a:noFill/>
-        </p:spPr>
-        <p:txBody>
-          <a:bodyPr wrap="square" lIns="0" rIns="0" tIns="0" bIns="0" anchor="t">
-            <a:spAutoFit/>
-          </a:bodyPr>
-          <a:lstStyle/>
-          <a:p>
-            <a:pPr algn="l">
-              <a:lnSpc>
-                <a:spcPts val="1105"/>
-              </a:lnSpc>
-            </a:pPr>
-            <a:r>
-              <a:rPr sz="850" b="1" i="0">
-                <a:solidFill>
-                  <a:srgbClr val="B54F35"/>
-                </a:solidFill>
-                <a:latin typeface="Arial"/>
-              </a:rPr>
-              <a:t>NOT SOLVED — making that reading mean “batch 4471, line 2, shift B”. Every tag is mapped by hand.</a:t>
-            </a:r>
-          </a:p>
-        </p:txBody>
-      </p:sp>
-      <p:sp>
-        <p:nvSpPr>
-          <p:cNvPr id="27" name="Rounded Rectangle 26"/>
+          <p:cNvPr id="25" name="Rounded Rectangle 24"/>
           <p:cNvSpPr/>
           <p:nvPr/>
         </p:nvSpPr>
         <p:spPr>
           <a:xfrm>
-            <a:off x="502920" y="4098000"/>
-            <a:ext cx="8600000" cy="622000"/>
+            <a:off x="502920" y="3280000"/>
+            <a:ext cx="8200000" cy="525000"/>
           </a:xfrm>
           <a:prstGeom prst="roundRect">
             <a:avLst>
@@ -4587,14 +4509,14 @@
       </p:sp>
       <p:sp>
         <p:nvSpPr>
-          <p:cNvPr id="28" name="TextBox 27"/>
+          <p:cNvPr id="26" name="TextBox 25"/>
           <p:cNvSpPr txBox="1"/>
           <p:nvPr/>
         </p:nvSpPr>
         <p:spPr>
           <a:xfrm>
-            <a:off x="702920" y="4174000"/>
-            <a:ext cx="5900000" cy="174625"/>
+            <a:off x="692920" y="3336000"/>
+            <a:ext cx="5370000" cy="162687"/>
           </a:xfrm>
           <a:prstGeom prst="rect">
             <a:avLst/>
@@ -4609,31 +4531,31 @@
           <a:p>
             <a:pPr algn="l">
               <a:lnSpc>
-                <a:spcPts val="1430"/>
+                <a:spcPts val="1365"/>
               </a:lnSpc>
             </a:pPr>
             <a:r>
-              <a:rPr sz="1100" b="1" i="0">
+              <a:rPr sz="1050" b="1" i="0">
                 <a:solidFill>
                   <a:srgbClr val="222A35"/>
                 </a:solidFill>
                 <a:latin typeface="Arial"/>
               </a:rPr>
-              <a:t>5 · THE PLANT RECORD</a:t>
-            </a:r>
-          </a:p>
-        </p:txBody>
-      </p:sp>
-      <p:sp>
-        <p:nvSpPr>
-          <p:cNvPr id="29" name="TextBox 28"/>
+              <a:t>5 · STORE</a:t>
+            </a:r>
+          </a:p>
+        </p:txBody>
+      </p:sp>
+      <p:sp>
+        <p:nvSpPr>
+          <p:cNvPr id="27" name="TextBox 26"/>
           <p:cNvSpPr txBox="1"/>
           <p:nvPr/>
         </p:nvSpPr>
         <p:spPr>
           <a:xfrm>
-            <a:off x="6602920" y="4196000"/>
-            <a:ext cx="2300000" cy="134937"/>
+            <a:off x="6062920" y="3350000"/>
+            <a:ext cx="2450000" cy="123952"/>
           </a:xfrm>
           <a:prstGeom prst="rect">
             <a:avLst/>
@@ -4648,31 +4570,31 @@
           <a:p>
             <a:pPr algn="r">
               <a:lnSpc>
-                <a:spcPts val="1105"/>
+                <a:spcPts val="1040"/>
               </a:lnSpc>
             </a:pPr>
             <a:r>
-              <a:rPr sz="850" b="1" i="1">
+              <a:rPr sz="800" b="1" i="1">
                 <a:solidFill>
                   <a:srgbClr val="2F5D8A"/>
                 </a:solidFill>
                 <a:latin typeface="Arial"/>
               </a:rPr>
-              <a:t>→  history you can search</a:t>
-            </a:r>
-          </a:p>
-        </p:txBody>
-      </p:sp>
-      <p:sp>
-        <p:nvSpPr>
-          <p:cNvPr id="30" name="TextBox 29"/>
+              <a:t>→  years of history</a:t>
+            </a:r>
+          </a:p>
+        </p:txBody>
+      </p:sp>
+      <p:sp>
+        <p:nvSpPr>
+          <p:cNvPr id="28" name="TextBox 27"/>
           <p:cNvSpPr txBox="1"/>
           <p:nvPr/>
         </p:nvSpPr>
         <p:spPr>
           <a:xfrm>
-            <a:off x="702920" y="4362625"/>
-            <a:ext cx="8200000" cy="134937"/>
+            <a:off x="692920" y="3508687"/>
+            <a:ext cx="7820000" cy="123952"/>
           </a:xfrm>
           <a:prstGeom prst="rect">
             <a:avLst/>
@@ -4687,31 +4609,31 @@
           <a:p>
             <a:pPr algn="l">
               <a:lnSpc>
-                <a:spcPts val="1105"/>
+                <a:spcPts val="1040"/>
               </a:lnSpc>
             </a:pPr>
             <a:r>
-              <a:rPr sz="850" b="0" i="1">
+              <a:rPr sz="800" b="0" i="1">
                 <a:solidFill>
                   <a:srgbClr val="5A6570"/>
                 </a:solidFill>
                 <a:latin typeface="Arial"/>
               </a:rPr>
-              <a:t>Keeps the readings, and knows what was being made at the time — which order, which recipe, which lot.</a:t>
-            </a:r>
-          </a:p>
-        </p:txBody>
-      </p:sp>
-      <p:sp>
-        <p:nvSpPr>
-          <p:cNvPr id="31" name="TextBox 30"/>
+              <a:t>Keeps the time-series so it can be looked back through.</a:t>
+            </a:r>
+          </a:p>
+        </p:txBody>
+      </p:sp>
+      <p:sp>
+        <p:nvSpPr>
+          <p:cNvPr id="29" name="TextBox 28"/>
           <p:cNvSpPr txBox="1"/>
           <p:nvPr/>
         </p:nvSpPr>
         <p:spPr>
           <a:xfrm>
-            <a:off x="702920" y="4509562"/>
-            <a:ext cx="8200000" cy="134937"/>
+            <a:off x="692920" y="3640639"/>
+            <a:ext cx="7820000" cy="123952"/>
           </a:xfrm>
           <a:prstGeom prst="rect">
             <a:avLst/>
@@ -4726,31 +4648,31 @@
           <a:p>
             <a:pPr algn="l">
               <a:lnSpc>
-                <a:spcPts val="1105"/>
+                <a:spcPts val="1040"/>
               </a:lnSpc>
             </a:pPr>
             <a:r>
-              <a:rPr sz="850" b="0" i="0">
+              <a:rPr sz="800" b="0" i="0">
                 <a:solidFill>
                   <a:srgbClr val="1A1A1A"/>
                 </a:solidFill>
                 <a:latin typeface="Arial"/>
               </a:rPr>
-              <a:t>AVEVA PI System · Siemens Opcenter · Rockwell Plex · SAP Digital Manufacturing · Aptean · Deacom · Nulogy · GE Proficy</a:t>
-            </a:r>
-          </a:p>
-        </p:txBody>
-      </p:sp>
-      <p:sp>
-        <p:nvSpPr>
-          <p:cNvPr id="32" name="Rounded Rectangle 31"/>
+              <a:t>AVEVA PI System · AspenTech InfoPlus.21 · GE Proficy Historian · Honeywell PHD · Canary</a:t>
+            </a:r>
+          </a:p>
+        </p:txBody>
+      </p:sp>
+      <p:sp>
+        <p:nvSpPr>
+          <p:cNvPr id="30" name="Rounded Rectangle 29"/>
           <p:cNvSpPr/>
           <p:nvPr/>
         </p:nvSpPr>
         <p:spPr>
           <a:xfrm>
-            <a:off x="502920" y="4766000"/>
-            <a:ext cx="8600000" cy="622000"/>
+            <a:off x="502920" y="3835000"/>
+            <a:ext cx="8200000" cy="525000"/>
           </a:xfrm>
           <a:prstGeom prst="roundRect">
             <a:avLst>
@@ -4758,11 +4680,11 @@
             </a:avLst>
           </a:prstGeom>
           <a:solidFill>
-            <a:srgbClr val="F2F4F7"/>
+            <a:srgbClr val="FAECE8"/>
           </a:solidFill>
-          <a:ln w="12700">
+          <a:ln w="22225">
             <a:solidFill>
-              <a:srgbClr val="C8D0D8"/>
+              <a:srgbClr val="B54F35"/>
             </a:solidFill>
           </a:ln>
           <a:effectLst/>
@@ -4791,14 +4713,92 @@
       </p:sp>
       <p:sp>
         <p:nvSpPr>
+          <p:cNvPr id="31" name="TextBox 30"/>
+          <p:cNvSpPr txBox="1"/>
+          <p:nvPr/>
+        </p:nvSpPr>
+        <p:spPr>
+          <a:xfrm>
+            <a:off x="692920" y="3891000"/>
+            <a:ext cx="5370000" cy="162687"/>
+          </a:xfrm>
+          <a:prstGeom prst="rect">
+            <a:avLst/>
+          </a:prstGeom>
+          <a:noFill/>
+        </p:spPr>
+        <p:txBody>
+          <a:bodyPr wrap="square" lIns="0" rIns="0" tIns="0" bIns="0" anchor="t">
+            <a:spAutoFit/>
+          </a:bodyPr>
+          <a:lstStyle/>
+          <a:p>
+            <a:pPr algn="l">
+              <a:lnSpc>
+                <a:spcPts val="1365"/>
+              </a:lnSpc>
+            </a:pPr>
+            <a:r>
+              <a:rPr sz="1050" b="1" i="0">
+                <a:solidFill>
+                  <a:srgbClr val="B54F35"/>
+                </a:solidFill>
+                <a:latin typeface="Arial"/>
+              </a:rPr>
+              <a:t>6 · CONTEXTUALISE</a:t>
+            </a:r>
+          </a:p>
+        </p:txBody>
+      </p:sp>
+      <p:sp>
+        <p:nvSpPr>
+          <p:cNvPr id="32" name="TextBox 31"/>
+          <p:cNvSpPr txBox="1"/>
+          <p:nvPr/>
+        </p:nvSpPr>
+        <p:spPr>
+          <a:xfrm>
+            <a:off x="6062920" y="3905000"/>
+            <a:ext cx="2450000" cy="123952"/>
+          </a:xfrm>
+          <a:prstGeom prst="rect">
+            <a:avLst/>
+          </a:prstGeom>
+          <a:noFill/>
+        </p:spPr>
+        <p:txBody>
+          <a:bodyPr wrap="square" lIns="0" rIns="0" tIns="0" bIns="0" anchor="t">
+            <a:spAutoFit/>
+          </a:bodyPr>
+          <a:lstStyle/>
+          <a:p>
+            <a:pPr algn="r">
+              <a:lnSpc>
+                <a:spcPts val="1040"/>
+              </a:lnSpc>
+            </a:pPr>
+            <a:r>
+              <a:rPr sz="800" b="1" i="1">
+                <a:solidFill>
+                  <a:srgbClr val="B54F35"/>
+                </a:solidFill>
+                <a:latin typeface="Arial"/>
+              </a:rPr>
+              <a:t>→  a reading that means something</a:t>
+            </a:r>
+          </a:p>
+        </p:txBody>
+      </p:sp>
+      <p:sp>
+        <p:nvSpPr>
           <p:cNvPr id="33" name="TextBox 32"/>
           <p:cNvSpPr txBox="1"/>
           <p:nvPr/>
         </p:nvSpPr>
         <p:spPr>
           <a:xfrm>
-            <a:off x="702920" y="4842000"/>
-            <a:ext cx="5900000" cy="174625"/>
+            <a:off x="692920" y="4063687"/>
+            <a:ext cx="7820000" cy="123952"/>
           </a:xfrm>
           <a:prstGeom prst="rect">
             <a:avLst/>
@@ -4813,109 +4813,31 @@
           <a:p>
             <a:pPr algn="l">
               <a:lnSpc>
-                <a:spcPts val="1430"/>
+                <a:spcPts val="1040"/>
               </a:lnSpc>
             </a:pPr>
             <a:r>
-              <a:rPr sz="1100" b="1" i="0">
-                <a:solidFill>
-                  <a:srgbClr val="222A35"/>
-                </a:solidFill>
-                <a:latin typeface="Arial"/>
-              </a:rPr>
-              <a:t>6 · ANALYTICS &amp; AI</a:t>
-            </a:r>
-          </a:p>
-        </p:txBody>
-      </p:sp>
-      <p:sp>
-        <p:nvSpPr>
-          <p:cNvPr id="34" name="TextBox 33"/>
-          <p:cNvSpPr txBox="1"/>
-          <p:nvPr/>
-        </p:nvSpPr>
-        <p:spPr>
-          <a:xfrm>
-            <a:off x="6602920" y="4864000"/>
-            <a:ext cx="2300000" cy="134937"/>
-          </a:xfrm>
-          <a:prstGeom prst="rect">
-            <a:avLst/>
-          </a:prstGeom>
-          <a:noFill/>
-        </p:spPr>
-        <p:txBody>
-          <a:bodyPr wrap="square" lIns="0" rIns="0" tIns="0" bIns="0" anchor="t">
-            <a:spAutoFit/>
-          </a:bodyPr>
-          <a:lstStyle/>
-          <a:p>
-            <a:pPr algn="r">
-              <a:lnSpc>
-                <a:spcPts val="1105"/>
-              </a:lnSpc>
-            </a:pPr>
-            <a:r>
-              <a:rPr sz="850" b="1" i="1">
-                <a:solidFill>
-                  <a:srgbClr val="2F5D8A"/>
-                </a:solidFill>
-                <a:latin typeface="Arial"/>
-              </a:rPr>
-              <a:t>→  an answer to act on</a:t>
-            </a:r>
-          </a:p>
-        </p:txBody>
-      </p:sp>
-      <p:sp>
-        <p:nvSpPr>
-          <p:cNvPr id="35" name="TextBox 34"/>
-          <p:cNvSpPr txBox="1"/>
-          <p:nvPr/>
-        </p:nvSpPr>
-        <p:spPr>
-          <a:xfrm>
-            <a:off x="702920" y="5030625"/>
-            <a:ext cx="8200000" cy="134937"/>
-          </a:xfrm>
-          <a:prstGeom prst="rect">
-            <a:avLst/>
-          </a:prstGeom>
-          <a:noFill/>
-        </p:spPr>
-        <p:txBody>
-          <a:bodyPr wrap="square" lIns="0" rIns="0" tIns="0" bIns="0" anchor="t">
-            <a:spAutoFit/>
-          </a:bodyPr>
-          <a:lstStyle/>
-          <a:p>
-            <a:pPr algn="l">
-              <a:lnSpc>
-                <a:spcPts val="1105"/>
-              </a:lnSpc>
-            </a:pPr>
-            <a:r>
-              <a:rPr sz="850" b="0" i="1">
+              <a:rPr sz="800" b="0" i="1">
                 <a:solidFill>
                   <a:srgbClr val="5A6570"/>
                 </a:solidFill>
                 <a:latin typeface="Arial"/>
               </a:rPr>
-              <a:t>Turns that history into a prediction, an explanation, or a yield gain. The layer everyone is trying to sell.</a:t>
-            </a:r>
-          </a:p>
-        </p:txBody>
-      </p:sp>
-      <p:sp>
-        <p:nvSpPr>
-          <p:cNvPr id="36" name="TextBox 35"/>
+              <a:t>Says which order, recipe, lot and shift the reading belongs to. Joining this to row 4 is the unsolved part.</a:t>
+            </a:r>
+          </a:p>
+        </p:txBody>
+      </p:sp>
+      <p:sp>
+        <p:nvSpPr>
+          <p:cNvPr id="34" name="TextBox 33"/>
           <p:cNvSpPr txBox="1"/>
           <p:nvPr/>
         </p:nvSpPr>
         <p:spPr>
           <a:xfrm>
-            <a:off x="702920" y="5177562"/>
-            <a:ext cx="8200000" cy="134937"/>
+            <a:off x="692920" y="4195639"/>
+            <a:ext cx="7820000" cy="123952"/>
           </a:xfrm>
           <a:prstGeom prst="rect">
             <a:avLst/>
@@ -4930,31 +4852,31 @@
           <a:p>
             <a:pPr algn="l">
               <a:lnSpc>
-                <a:spcPts val="1105"/>
+                <a:spcPts val="1040"/>
               </a:lnSpc>
             </a:pPr>
             <a:r>
-              <a:rPr sz="850" b="0" i="0">
+              <a:rPr sz="800" b="0" i="0">
                 <a:solidFill>
                   <a:srgbClr val="1A1A1A"/>
                 </a:solidFill>
                 <a:latin typeface="Arial"/>
               </a:rPr>
-              <a:t>Sight Machine · Seeq · Augury · Oden · Cognite · Quartic.ai · Siemens Senseye · AspenTech Mtell · C3 AI · Falkonry</a:t>
-            </a:r>
-          </a:p>
-        </p:txBody>
-      </p:sp>
-      <p:sp>
-        <p:nvSpPr>
-          <p:cNvPr id="37" name="Rounded Rectangle 36"/>
+              <a:t>Siemens Opcenter · Rockwell Plex · SAP Digital Mfg · DELMIA Apriso · TrakSYS · Aptean · Deacom · Nulogy · Sepasoft</a:t>
+            </a:r>
+          </a:p>
+        </p:txBody>
+      </p:sp>
+      <p:sp>
+        <p:nvSpPr>
+          <p:cNvPr id="35" name="Rounded Rectangle 34"/>
           <p:cNvSpPr/>
           <p:nvPr/>
         </p:nvSpPr>
         <p:spPr>
           <a:xfrm>
-            <a:off x="9302920" y="1080000"/>
-            <a:ext cx="2386160" cy="2079000"/>
+            <a:off x="502920" y="4390000"/>
+            <a:ext cx="8200000" cy="525000"/>
           </a:xfrm>
           <a:prstGeom prst="roundRect">
             <a:avLst>
@@ -4962,11 +4884,11 @@
             </a:avLst>
           </a:prstGeom>
           <a:solidFill>
-            <a:srgbClr val="E4ECF4"/>
+            <a:srgbClr val="F2F4F7"/>
           </a:solidFill>
           <a:ln w="12700">
             <a:solidFill>
-              <a:srgbClr val="2F5D8A"/>
+              <a:srgbClr val="C8D0D8"/>
             </a:solidFill>
           </a:ln>
           <a:effectLst/>
@@ -4995,14 +4917,14 @@
       </p:sp>
       <p:sp>
         <p:nvSpPr>
-          <p:cNvPr id="38" name="TextBox 37"/>
+          <p:cNvPr id="36" name="TextBox 35"/>
           <p:cNvSpPr txBox="1"/>
           <p:nvPr/>
         </p:nvSpPr>
         <p:spPr>
           <a:xfrm>
-            <a:off x="9462920" y="1180000"/>
-            <a:ext cx="2066160" cy="150812"/>
+            <a:off x="692920" y="4446000"/>
+            <a:ext cx="5370000" cy="162687"/>
           </a:xfrm>
           <a:prstGeom prst="rect">
             <a:avLst/>
@@ -5017,17 +4939,95 @@
           <a:p>
             <a:pPr algn="l">
               <a:lnSpc>
-                <a:spcPts val="1235"/>
+                <a:spcPts val="1365"/>
               </a:lnSpc>
             </a:pPr>
             <a:r>
-              <a:rPr sz="950" b="1" i="0">
+              <a:rPr sz="1050" b="1" i="0">
+                <a:solidFill>
+                  <a:srgbClr val="222A35"/>
+                </a:solidFill>
+                <a:latin typeface="Arial"/>
+              </a:rPr>
+              <a:t>7 · ANALYSE</a:t>
+            </a:r>
+          </a:p>
+        </p:txBody>
+      </p:sp>
+      <p:sp>
+        <p:nvSpPr>
+          <p:cNvPr id="37" name="TextBox 36"/>
+          <p:cNvSpPr txBox="1"/>
+          <p:nvPr/>
+        </p:nvSpPr>
+        <p:spPr>
+          <a:xfrm>
+            <a:off x="6062920" y="4460000"/>
+            <a:ext cx="2450000" cy="123952"/>
+          </a:xfrm>
+          <a:prstGeom prst="rect">
+            <a:avLst/>
+          </a:prstGeom>
+          <a:noFill/>
+        </p:spPr>
+        <p:txBody>
+          <a:bodyPr wrap="square" lIns="0" rIns="0" tIns="0" bIns="0" anchor="t">
+            <a:spAutoFit/>
+          </a:bodyPr>
+          <a:lstStyle/>
+          <a:p>
+            <a:pPr algn="r">
+              <a:lnSpc>
+                <a:spcPts val="1040"/>
+              </a:lnSpc>
+            </a:pPr>
+            <a:r>
+              <a:rPr sz="800" b="1" i="1">
                 <a:solidFill>
                   <a:srgbClr val="2F5D8A"/>
                 </a:solidFill>
                 <a:latin typeface="Arial"/>
               </a:rPr>
-              <a:t>GATES EVERY LAYER</a:t>
+              <a:t>→  an answer to act on</a:t>
+            </a:r>
+          </a:p>
+        </p:txBody>
+      </p:sp>
+      <p:sp>
+        <p:nvSpPr>
+          <p:cNvPr id="38" name="TextBox 37"/>
+          <p:cNvSpPr txBox="1"/>
+          <p:nvPr/>
+        </p:nvSpPr>
+        <p:spPr>
+          <a:xfrm>
+            <a:off x="692920" y="4618687"/>
+            <a:ext cx="7820000" cy="123952"/>
+          </a:xfrm>
+          <a:prstGeom prst="rect">
+            <a:avLst/>
+          </a:prstGeom>
+          <a:noFill/>
+        </p:spPr>
+        <p:txBody>
+          <a:bodyPr wrap="square" lIns="0" rIns="0" tIns="0" bIns="0" anchor="t">
+            <a:spAutoFit/>
+          </a:bodyPr>
+          <a:lstStyle/>
+          <a:p>
+            <a:pPr algn="l">
+              <a:lnSpc>
+                <a:spcPts val="1040"/>
+              </a:lnSpc>
+            </a:pPr>
+            <a:r>
+              <a:rPr sz="800" b="0" i="1">
+                <a:solidFill>
+                  <a:srgbClr val="5A6570"/>
+                </a:solidFill>
+                <a:latin typeface="Arial"/>
+              </a:rPr>
+              <a:t>Predicts a failure, explains a defect, lifts a yield, or writes a setpoint back down.</a:t>
             </a:r>
           </a:p>
         </p:txBody>
@@ -5040,8 +5040,8 @@
         </p:nvSpPr>
         <p:spPr>
           <a:xfrm>
-            <a:off x="9462920" y="1390812"/>
-            <a:ext cx="2066160" cy="561340"/>
+            <a:off x="692920" y="4750639"/>
+            <a:ext cx="7820000" cy="123952"/>
           </a:xfrm>
           <a:prstGeom prst="rect">
             <a:avLst/>
@@ -5056,109 +5056,31 @@
           <a:p>
             <a:pPr algn="l">
               <a:lnSpc>
-                <a:spcPts val="1105"/>
+                <a:spcPts val="1040"/>
               </a:lnSpc>
             </a:pPr>
             <a:r>
-              <a:rPr sz="850" b="0" i="0">
+              <a:rPr sz="800" b="0" i="0">
                 <a:solidFill>
                   <a:srgbClr val="1A1A1A"/>
                 </a:solidFill>
                 <a:latin typeface="Arial"/>
               </a:rPr>
-              <a:t>OT network security — Claroty, Dragos, Nozomi. Nothing leaves the plant network without a security review.</a:t>
-            </a:r>
-          </a:p>
-        </p:txBody>
-      </p:sp>
-      <p:sp>
-        <p:nvSpPr>
-          <p:cNvPr id="40" name="TextBox 39"/>
-          <p:cNvSpPr txBox="1"/>
-          <p:nvPr/>
-        </p:nvSpPr>
-        <p:spPr>
-          <a:xfrm>
-            <a:off x="9462920" y="2047152"/>
-            <a:ext cx="2066160" cy="421005"/>
-          </a:xfrm>
-          <a:prstGeom prst="rect">
-            <a:avLst/>
-          </a:prstGeom>
-          <a:noFill/>
-        </p:spPr>
-        <p:txBody>
-          <a:bodyPr wrap="square" lIns="0" rIns="0" tIns="0" bIns="0" anchor="t">
-            <a:spAutoFit/>
-          </a:bodyPr>
-          <a:lstStyle/>
-          <a:p>
-            <a:pPr algn="l">
-              <a:lnSpc>
-                <a:spcPts val="1105"/>
-              </a:lnSpc>
-            </a:pPr>
-            <a:r>
-              <a:rPr sz="850" b="0" i="0">
-                <a:solidFill>
-                  <a:srgbClr val="1A1A1A"/>
-                </a:solidFill>
-                <a:latin typeface="Arial"/>
-              </a:rPr>
-              <a:t>Systems integrators — they build these deployments, and they are why the bill is $50–150k.</a:t>
-            </a:r>
-          </a:p>
-        </p:txBody>
-      </p:sp>
-      <p:sp>
-        <p:nvSpPr>
-          <p:cNvPr id="41" name="TextBox 40"/>
-          <p:cNvSpPr txBox="1"/>
-          <p:nvPr/>
-        </p:nvSpPr>
-        <p:spPr>
-          <a:xfrm>
-            <a:off x="9462920" y="2563157"/>
-            <a:ext cx="2066160" cy="561340"/>
-          </a:xfrm>
-          <a:prstGeom prst="rect">
-            <a:avLst/>
-          </a:prstGeom>
-          <a:noFill/>
-        </p:spPr>
-        <p:txBody>
-          <a:bodyPr wrap="square" lIns="0" rIns="0" tIns="0" bIns="0" anchor="t">
-            <a:spAutoFit/>
-          </a:bodyPr>
-          <a:lstStyle/>
-          <a:p>
-            <a:pPr algn="l">
-              <a:lnSpc>
-                <a:spcPts val="1105"/>
-              </a:lnSpc>
-            </a:pPr>
-            <a:r>
-              <a:rPr sz="850" b="0" i="0">
-                <a:solidFill>
-                  <a:srgbClr val="1A1A1A"/>
-                </a:solidFill>
-                <a:latin typeface="Arial"/>
-              </a:rPr>
-              <a:t>Regulation — FDA 21 CFR 113 and 114, Grade A PMO, USDA FSIS. The only force that makes a measurement compulsory.</a:t>
-            </a:r>
-          </a:p>
-        </p:txBody>
-      </p:sp>
-      <p:sp>
-        <p:nvSpPr>
-          <p:cNvPr id="42" name="Rounded Rectangle 41"/>
+              <a:t>Sight Machine · Seeq · Augury Process Health · Oden · Cognite · Quartic.ai · Senseye · Mtell · Pavilion8 · C3 AI · Falkonry</a:t>
+            </a:r>
+          </a:p>
+        </p:txBody>
+      </p:sp>
+      <p:sp>
+        <p:nvSpPr>
+          <p:cNvPr id="40" name="Rounded Rectangle 39"/>
           <p:cNvSpPr/>
           <p:nvPr/>
         </p:nvSpPr>
         <p:spPr>
           <a:xfrm>
-            <a:off x="9302920" y="3309000"/>
-            <a:ext cx="2386160" cy="2079000"/>
+            <a:off x="8882920" y="1060000"/>
+            <a:ext cx="2806160" cy="941250"/>
           </a:xfrm>
           <a:prstGeom prst="roundRect">
             <a:avLst>
@@ -5199,14 +5121,14 @@
       </p:sp>
       <p:sp>
         <p:nvSpPr>
-          <p:cNvPr id="43" name="TextBox 42"/>
+          <p:cNvPr id="41" name="TextBox 40"/>
           <p:cNvSpPr txBox="1"/>
           <p:nvPr/>
         </p:nvSpPr>
         <p:spPr>
           <a:xfrm>
-            <a:off x="9462920" y="3409000"/>
-            <a:ext cx="2066160" cy="150812"/>
+            <a:off x="9022920" y="1112000"/>
+            <a:ext cx="2526160" cy="139446"/>
           </a:xfrm>
           <a:prstGeom prst="rect">
             <a:avLst/>
@@ -5221,31 +5143,31 @@
           <a:p>
             <a:pPr algn="l">
               <a:lnSpc>
-                <a:spcPts val="1235"/>
+                <a:spcPts val="1170"/>
               </a:lnSpc>
             </a:pPr>
             <a:r>
-              <a:rPr sz="950" b="1" i="0">
+              <a:rPr sz="900" b="1" i="0">
                 <a:solidFill>
                   <a:srgbClr val="2D6E63"/>
                 </a:solidFill>
                 <a:latin typeface="Arial"/>
               </a:rPr>
-              <a:t>SKIPS EVERY LAYER</a:t>
-            </a:r>
-          </a:p>
-        </p:txBody>
-      </p:sp>
-      <p:sp>
-        <p:nvSpPr>
-          <p:cNvPr id="44" name="TextBox 43"/>
+              <a:t>QUALITY &amp; COMPLIANCE</a:t>
+            </a:r>
+          </a:p>
+        </p:txBody>
+      </p:sp>
+      <p:sp>
+        <p:nvSpPr>
+          <p:cNvPr id="42" name="TextBox 41"/>
           <p:cNvSpPr txBox="1"/>
           <p:nvPr/>
         </p:nvSpPr>
         <p:spPr>
           <a:xfrm>
-            <a:off x="9462920" y="3619812"/>
-            <a:ext cx="2066160" cy="280670"/>
+            <a:off x="9022920" y="1265446"/>
+            <a:ext cx="2526160" cy="390144"/>
           </a:xfrm>
           <a:prstGeom prst="rect">
             <a:avLst/>
@@ -5260,109 +5182,31 @@
           <a:p>
             <a:pPr algn="l">
               <a:lnSpc>
-                <a:spcPts val="1105"/>
+                <a:spcPts val="1024"/>
               </a:lnSpc>
             </a:pPr>
             <a:r>
-              <a:rPr sz="850" b="0" i="0">
+              <a:rPr sz="800" b="0" i="0">
                 <a:solidFill>
                   <a:srgbClr val="1A1A1A"/>
                 </a:solidFill>
                 <a:latin typeface="Arial"/>
               </a:rPr>
-              <a:t>Augury fits its own wireless sensors and goes straight to its own cloud.</a:t>
-            </a:r>
-          </a:p>
-        </p:txBody>
-      </p:sp>
-      <p:sp>
-        <p:nvSpPr>
-          <p:cNvPr id="45" name="TextBox 44"/>
-          <p:cNvSpPr txBox="1"/>
-          <p:nvPr/>
-        </p:nvSpPr>
-        <p:spPr>
-          <a:xfrm>
-            <a:off x="9462920" y="3995482"/>
-            <a:ext cx="2066160" cy="421005"/>
-          </a:xfrm>
-          <a:prstGeom prst="rect">
-            <a:avLst/>
-          </a:prstGeom>
-          <a:noFill/>
-        </p:spPr>
-        <p:txBody>
-          <a:bodyPr wrap="square" lIns="0" rIns="0" tIns="0" bIns="0" anchor="t">
-            <a:spAutoFit/>
-          </a:bodyPr>
-          <a:lstStyle/>
-          <a:p>
-            <a:pPr algn="l">
-              <a:lnSpc>
-                <a:spcPts val="1105"/>
-              </a:lnSpc>
-            </a:pPr>
-            <a:r>
-              <a:rPr sz="850" b="0" i="0">
-                <a:solidFill>
-                  <a:srgbClr val="1A1A1A"/>
-                </a:solidFill>
-                <a:latin typeface="Arial"/>
-              </a:rPr>
-              <a:t>Tulip and Redzone ask the operator on a tablet, never touching the control system.</a:t>
-            </a:r>
-          </a:p>
-        </p:txBody>
-      </p:sp>
-      <p:sp>
-        <p:nvSpPr>
-          <p:cNvPr id="46" name="TextBox 45"/>
-          <p:cNvSpPr txBox="1"/>
-          <p:nvPr/>
-        </p:nvSpPr>
-        <p:spPr>
-          <a:xfrm>
-            <a:off x="9462920" y="4511487"/>
-            <a:ext cx="2066160" cy="421005"/>
-          </a:xfrm>
-          <a:prstGeom prst="rect">
-            <a:avLst/>
-          </a:prstGeom>
-          <a:noFill/>
-        </p:spPr>
-        <p:txBody>
-          <a:bodyPr wrap="square" lIns="0" rIns="0" tIns="0" bIns="0" anchor="t">
-            <a:spAutoFit/>
-          </a:bodyPr>
-          <a:lstStyle/>
-          <a:p>
-            <a:pPr algn="l">
-              <a:lnSpc>
-                <a:spcPts val="1105"/>
-              </a:lnSpc>
-            </a:pPr>
-            <a:r>
-              <a:rPr sz="850" b="1" i="0">
-                <a:solidFill>
-                  <a:srgbClr val="2D6E63"/>
-                </a:solidFill>
-                <a:latin typeface="Arial"/>
-              </a:rPr>
-              <a:t>These are the products that actually sold into mid-sized plants — by avoiding layers 2 to 5.</a:t>
-            </a:r>
-          </a:p>
-        </p:txBody>
-      </p:sp>
-      <p:sp>
-        <p:nvSpPr>
-          <p:cNvPr id="47" name="Rounded Rectangle 46"/>
+              <a:t>SafetyChain · Trustwell · TraceGains · FoodReady · Specright · Safefood 360 · LabWare and SampleManager (lab)</a:t>
+            </a:r>
+          </a:p>
+        </p:txBody>
+      </p:sp>
+      <p:sp>
+        <p:nvSpPr>
+          <p:cNvPr id="43" name="Rounded Rectangle 42"/>
           <p:cNvSpPr/>
           <p:nvPr/>
         </p:nvSpPr>
         <p:spPr>
           <a:xfrm>
-            <a:off x="502920" y="5498000"/>
-            <a:ext cx="11186160" cy="1054500"/>
+            <a:off x="8882920" y="2031250"/>
+            <a:ext cx="2806160" cy="941250"/>
           </a:xfrm>
           <a:prstGeom prst="roundRect">
             <a:avLst>
@@ -5370,10 +5214,12 @@
             </a:avLst>
           </a:prstGeom>
           <a:solidFill>
-            <a:srgbClr val="222A35"/>
+            <a:srgbClr val="E4EFED"/>
           </a:solidFill>
-          <a:ln>
-            <a:noFill/>
+          <a:ln w="12700">
+            <a:solidFill>
+              <a:srgbClr val="2D6E63"/>
+            </a:solidFill>
           </a:ln>
           <a:effectLst/>
         </p:spPr>
@@ -5401,13 +5247,515 @@
       </p:sp>
       <p:sp>
         <p:nvSpPr>
+          <p:cNvPr id="44" name="TextBox 43"/>
+          <p:cNvSpPr txBox="1"/>
+          <p:nvPr/>
+        </p:nvSpPr>
+        <p:spPr>
+          <a:xfrm>
+            <a:off x="9022920" y="2083250"/>
+            <a:ext cx="2526160" cy="139446"/>
+          </a:xfrm>
+          <a:prstGeom prst="rect">
+            <a:avLst/>
+          </a:prstGeom>
+          <a:noFill/>
+        </p:spPr>
+        <p:txBody>
+          <a:bodyPr wrap="square" lIns="0" rIns="0" tIns="0" bIns="0" anchor="t">
+            <a:spAutoFit/>
+          </a:bodyPr>
+          <a:lstStyle/>
+          <a:p>
+            <a:pPr algn="l">
+              <a:lnSpc>
+                <a:spcPts val="1170"/>
+              </a:lnSpc>
+            </a:pPr>
+            <a:r>
+              <a:rPr sz="900" b="1" i="0">
+                <a:solidFill>
+                  <a:srgbClr val="2D6E63"/>
+                </a:solidFill>
+                <a:latin typeface="Arial"/>
+              </a:rPr>
+              <a:t>MAINTENANCE</a:t>
+            </a:r>
+          </a:p>
+        </p:txBody>
+      </p:sp>
+      <p:sp>
+        <p:nvSpPr>
+          <p:cNvPr id="45" name="TextBox 44"/>
+          <p:cNvSpPr txBox="1"/>
+          <p:nvPr/>
+        </p:nvSpPr>
+        <p:spPr>
+          <a:xfrm>
+            <a:off x="9022920" y="2236696"/>
+            <a:ext cx="2526160" cy="130048"/>
+          </a:xfrm>
+          <a:prstGeom prst="rect">
+            <a:avLst/>
+          </a:prstGeom>
+          <a:noFill/>
+        </p:spPr>
+        <p:txBody>
+          <a:bodyPr wrap="square" lIns="0" rIns="0" tIns="0" bIns="0" anchor="t">
+            <a:spAutoFit/>
+          </a:bodyPr>
+          <a:lstStyle/>
+          <a:p>
+            <a:pPr algn="l">
+              <a:lnSpc>
+                <a:spcPts val="1024"/>
+              </a:lnSpc>
+            </a:pPr>
+            <a:r>
+              <a:rPr sz="800" b="0" i="0">
+                <a:solidFill>
+                  <a:srgbClr val="1A1A1A"/>
+                </a:solidFill>
+                <a:latin typeface="Arial"/>
+              </a:rPr>
+              <a:t>MaintainX · Fiix · UpKeep · IBM Maximo · Limble</a:t>
+            </a:r>
+          </a:p>
+        </p:txBody>
+      </p:sp>
+      <p:sp>
+        <p:nvSpPr>
+          <p:cNvPr id="46" name="Rounded Rectangle 45"/>
+          <p:cNvSpPr/>
+          <p:nvPr/>
+        </p:nvSpPr>
+        <p:spPr>
+          <a:xfrm>
+            <a:off x="8882920" y="3002500"/>
+            <a:ext cx="2806160" cy="941250"/>
+          </a:xfrm>
+          <a:prstGeom prst="roundRect">
+            <a:avLst>
+              <a:gd name="adj" fmla="val 8000"/>
+            </a:avLst>
+          </a:prstGeom>
+          <a:solidFill>
+            <a:srgbClr val="E4EFED"/>
+          </a:solidFill>
+          <a:ln w="12700">
+            <a:solidFill>
+              <a:srgbClr val="2D6E63"/>
+            </a:solidFill>
+          </a:ln>
+          <a:effectLst/>
+        </p:spPr>
+        <p:style>
+          <a:lnRef idx="1">
+            <a:schemeClr val="accent1"/>
+          </a:lnRef>
+          <a:fillRef idx="3">
+            <a:schemeClr val="accent1"/>
+          </a:fillRef>
+          <a:effectRef idx="2">
+            <a:schemeClr val="accent1"/>
+          </a:effectRef>
+          <a:fontRef idx="minor">
+            <a:schemeClr val="lt1"/>
+          </a:fontRef>
+        </p:style>
+        <p:txBody>
+          <a:bodyPr rtlCol="0" anchor="ctr" wrap="square" lIns="90000" rIns="90000" tIns="40000" bIns="40000"/>
+          <a:lstStyle/>
+          <a:p>
+            <a:pPr algn="ctr"/>
+          </a:p>
+        </p:txBody>
+      </p:sp>
+      <p:sp>
+        <p:nvSpPr>
+          <p:cNvPr id="47" name="TextBox 46"/>
+          <p:cNvSpPr txBox="1"/>
+          <p:nvPr/>
+        </p:nvSpPr>
+        <p:spPr>
+          <a:xfrm>
+            <a:off x="9022920" y="3054500"/>
+            <a:ext cx="2526160" cy="139446"/>
+          </a:xfrm>
+          <a:prstGeom prst="rect">
+            <a:avLst/>
+          </a:prstGeom>
+          <a:noFill/>
+        </p:spPr>
+        <p:txBody>
+          <a:bodyPr wrap="square" lIns="0" rIns="0" tIns="0" bIns="0" anchor="t">
+            <a:spAutoFit/>
+          </a:bodyPr>
+          <a:lstStyle/>
+          <a:p>
+            <a:pPr algn="l">
+              <a:lnSpc>
+                <a:spcPts val="1170"/>
+              </a:lnSpc>
+            </a:pPr>
+            <a:r>
+              <a:rPr sz="900" b="1" i="0">
+                <a:solidFill>
+                  <a:srgbClr val="2D6E63"/>
+                </a:solidFill>
+                <a:latin typeface="Arial"/>
+              </a:rPr>
+              <a:t>PLAN &amp; ORDER</a:t>
+            </a:r>
+          </a:p>
+        </p:txBody>
+      </p:sp>
+      <p:sp>
+        <p:nvSpPr>
           <p:cNvPr id="48" name="TextBox 47"/>
           <p:cNvSpPr txBox="1"/>
           <p:nvPr/>
         </p:nvSpPr>
         <p:spPr>
           <a:xfrm>
-            <a:off x="742920" y="5648000"/>
+            <a:off x="9022920" y="3207946"/>
+            <a:ext cx="2526160" cy="260096"/>
+          </a:xfrm>
+          <a:prstGeom prst="rect">
+            <a:avLst/>
+          </a:prstGeom>
+          <a:noFill/>
+        </p:spPr>
+        <p:txBody>
+          <a:bodyPr wrap="square" lIns="0" rIns="0" tIns="0" bIns="0" anchor="t">
+            <a:spAutoFit/>
+          </a:bodyPr>
+          <a:lstStyle/>
+          <a:p>
+            <a:pPr algn="l">
+              <a:lnSpc>
+                <a:spcPts val="1024"/>
+              </a:lnSpc>
+            </a:pPr>
+            <a:r>
+              <a:rPr sz="800" b="0" i="0">
+                <a:solidFill>
+                  <a:srgbClr val="1A1A1A"/>
+                </a:solidFill>
+                <a:latin typeface="Arial"/>
+              </a:rPr>
+              <a:t>SAP · Oracle · NetSuite · Infor · o9 · Blue Yonder · RELEX · PlanetTogether · Semia</a:t>
+            </a:r>
+          </a:p>
+        </p:txBody>
+      </p:sp>
+      <p:sp>
+        <p:nvSpPr>
+          <p:cNvPr id="49" name="Rounded Rectangle 48"/>
+          <p:cNvSpPr/>
+          <p:nvPr/>
+        </p:nvSpPr>
+        <p:spPr>
+          <a:xfrm>
+            <a:off x="8882920" y="3973750"/>
+            <a:ext cx="2806160" cy="941250"/>
+          </a:xfrm>
+          <a:prstGeom prst="roundRect">
+            <a:avLst>
+              <a:gd name="adj" fmla="val 8000"/>
+            </a:avLst>
+          </a:prstGeom>
+          <a:solidFill>
+            <a:srgbClr val="E4EFED"/>
+          </a:solidFill>
+          <a:ln w="12700">
+            <a:solidFill>
+              <a:srgbClr val="2D6E63"/>
+            </a:solidFill>
+          </a:ln>
+          <a:effectLst/>
+        </p:spPr>
+        <p:style>
+          <a:lnRef idx="1">
+            <a:schemeClr val="accent1"/>
+          </a:lnRef>
+          <a:fillRef idx="3">
+            <a:schemeClr val="accent1"/>
+          </a:fillRef>
+          <a:effectRef idx="2">
+            <a:schemeClr val="accent1"/>
+          </a:effectRef>
+          <a:fontRef idx="minor">
+            <a:schemeClr val="lt1"/>
+          </a:fontRef>
+        </p:style>
+        <p:txBody>
+          <a:bodyPr rtlCol="0" anchor="ctr" wrap="square" lIns="90000" rIns="90000" tIns="40000" bIns="40000"/>
+          <a:lstStyle/>
+          <a:p>
+            <a:pPr algn="ctr"/>
+          </a:p>
+        </p:txBody>
+      </p:sp>
+      <p:sp>
+        <p:nvSpPr>
+          <p:cNvPr id="50" name="TextBox 49"/>
+          <p:cNvSpPr txBox="1"/>
+          <p:nvPr/>
+        </p:nvSpPr>
+        <p:spPr>
+          <a:xfrm>
+            <a:off x="9022920" y="4025750"/>
+            <a:ext cx="2526160" cy="139446"/>
+          </a:xfrm>
+          <a:prstGeom prst="rect">
+            <a:avLst/>
+          </a:prstGeom>
+          <a:noFill/>
+        </p:spPr>
+        <p:txBody>
+          <a:bodyPr wrap="square" lIns="0" rIns="0" tIns="0" bIns="0" anchor="t">
+            <a:spAutoFit/>
+          </a:bodyPr>
+          <a:lstStyle/>
+          <a:p>
+            <a:pPr algn="l">
+              <a:lnSpc>
+                <a:spcPts val="1170"/>
+              </a:lnSpc>
+            </a:pPr>
+            <a:r>
+              <a:rPr sz="900" b="1" i="0">
+                <a:solidFill>
+                  <a:srgbClr val="2D6E63"/>
+                </a:solidFill>
+                <a:latin typeface="Arial"/>
+              </a:rPr>
+              <a:t>FRONTLINE CAPTURE</a:t>
+            </a:r>
+          </a:p>
+        </p:txBody>
+      </p:sp>
+      <p:sp>
+        <p:nvSpPr>
+          <p:cNvPr id="51" name="TextBox 50"/>
+          <p:cNvSpPr txBox="1"/>
+          <p:nvPr/>
+        </p:nvSpPr>
+        <p:spPr>
+          <a:xfrm>
+            <a:off x="9022920" y="4179196"/>
+            <a:ext cx="2526160" cy="260096"/>
+          </a:xfrm>
+          <a:prstGeom prst="rect">
+            <a:avLst/>
+          </a:prstGeom>
+          <a:noFill/>
+        </p:spPr>
+        <p:txBody>
+          <a:bodyPr wrap="square" lIns="0" rIns="0" tIns="0" bIns="0" anchor="t">
+            <a:spAutoFit/>
+          </a:bodyPr>
+          <a:lstStyle/>
+          <a:p>
+            <a:pPr algn="l">
+              <a:lnSpc>
+                <a:spcPts val="1024"/>
+              </a:lnSpc>
+            </a:pPr>
+            <a:r>
+              <a:rPr sz="800" b="0" i="0">
+                <a:solidFill>
+                  <a:srgbClr val="1A1A1A"/>
+                </a:solidFill>
+                <a:latin typeface="Arial"/>
+              </a:rPr>
+              <a:t>Tulip · Redzone · Parsable · Augmentir · Dozuki · Evocon</a:t>
+            </a:r>
+          </a:p>
+        </p:txBody>
+      </p:sp>
+      <p:sp>
+        <p:nvSpPr>
+          <p:cNvPr id="52" name="Rounded Rectangle 51"/>
+          <p:cNvSpPr/>
+          <p:nvPr/>
+        </p:nvSpPr>
+        <p:spPr>
+          <a:xfrm>
+            <a:off x="502920" y="4995000"/>
+            <a:ext cx="11186160" cy="400000"/>
+          </a:xfrm>
+          <a:prstGeom prst="roundRect">
+            <a:avLst>
+              <a:gd name="adj" fmla="val 8000"/>
+            </a:avLst>
+          </a:prstGeom>
+          <a:solidFill>
+            <a:srgbClr val="E4ECF4"/>
+          </a:solidFill>
+          <a:ln w="12700">
+            <a:solidFill>
+              <a:srgbClr val="2F5D8A"/>
+            </a:solidFill>
+          </a:ln>
+          <a:effectLst/>
+        </p:spPr>
+        <p:style>
+          <a:lnRef idx="1">
+            <a:schemeClr val="accent1"/>
+          </a:lnRef>
+          <a:fillRef idx="3">
+            <a:schemeClr val="accent1"/>
+          </a:fillRef>
+          <a:effectRef idx="2">
+            <a:schemeClr val="accent1"/>
+          </a:effectRef>
+          <a:fontRef idx="minor">
+            <a:schemeClr val="lt1"/>
+          </a:fontRef>
+        </p:style>
+        <p:txBody>
+          <a:bodyPr rtlCol="0" anchor="ctr" wrap="square" lIns="90000" rIns="90000" tIns="40000" bIns="40000"/>
+          <a:lstStyle/>
+          <a:p>
+            <a:pPr algn="ctr"/>
+          </a:p>
+        </p:txBody>
+      </p:sp>
+      <p:sp>
+        <p:nvSpPr>
+          <p:cNvPr id="53" name="TextBox 52"/>
+          <p:cNvSpPr txBox="1"/>
+          <p:nvPr/>
+        </p:nvSpPr>
+        <p:spPr>
+          <a:xfrm>
+            <a:off x="692920" y="5053000"/>
+            <a:ext cx="10806160" cy="131699"/>
+          </a:xfrm>
+          <a:prstGeom prst="rect">
+            <a:avLst/>
+          </a:prstGeom>
+          <a:noFill/>
+        </p:spPr>
+        <p:txBody>
+          <a:bodyPr wrap="square" lIns="0" rIns="0" tIns="0" bIns="0" anchor="t">
+            <a:spAutoFit/>
+          </a:bodyPr>
+          <a:lstStyle/>
+          <a:p>
+            <a:pPr algn="l">
+              <a:lnSpc>
+                <a:spcPts val="1105"/>
+              </a:lnSpc>
+            </a:pPr>
+            <a:r>
+              <a:rPr sz="850" b="0" i="0">
+                <a:solidFill>
+                  <a:srgbClr val="1A1A1A"/>
+                </a:solidFill>
+                <a:latin typeface="Arial"/>
+              </a:rPr>
+              <a:t>GATES EVERY ROW:   OT security (Claroty, Dragos)   ·   systems integrators, who are why the bill is $50–150k   ·   regulation (FDA 21 CFR 113 and 114, Grade A PMO, USDA FSIS)</a:t>
+            </a:r>
+          </a:p>
+        </p:txBody>
+      </p:sp>
+      <p:sp>
+        <p:nvSpPr>
+          <p:cNvPr id="54" name="TextBox 53"/>
+          <p:cNvSpPr txBox="1"/>
+          <p:nvPr/>
+        </p:nvSpPr>
+        <p:spPr>
+          <a:xfrm>
+            <a:off x="692920" y="5200699"/>
+            <a:ext cx="10806160" cy="131699"/>
+          </a:xfrm>
+          <a:prstGeom prst="rect">
+            <a:avLst/>
+          </a:prstGeom>
+          <a:noFill/>
+        </p:spPr>
+        <p:txBody>
+          <a:bodyPr wrap="square" lIns="0" rIns="0" tIns="0" bIns="0" anchor="t">
+            <a:spAutoFit/>
+          </a:bodyPr>
+          <a:lstStyle/>
+          <a:p>
+            <a:pPr algn="l">
+              <a:lnSpc>
+                <a:spcPts val="1105"/>
+              </a:lnSpc>
+            </a:pPr>
+            <a:r>
+              <a:rPr sz="850" b="0" i="0">
+                <a:solidFill>
+                  <a:srgbClr val="1A1A1A"/>
+                </a:solidFill>
+                <a:latin typeface="Arial"/>
+              </a:rPr>
+              <a:t>SKIPS MOST ROWS:   Augury fits its own sensors and goes straight to its cloud   ·   Tulip and Redzone ask the operator instead   ·   these are what actually sold into mid-sized plants</a:t>
+            </a:r>
+          </a:p>
+        </p:txBody>
+      </p:sp>
+      <p:sp>
+        <p:nvSpPr>
+          <p:cNvPr id="55" name="Rounded Rectangle 54"/>
+          <p:cNvSpPr/>
+          <p:nvPr/>
+        </p:nvSpPr>
+        <p:spPr>
+          <a:xfrm>
+            <a:off x="502920" y="5465000"/>
+            <a:ext cx="11186160" cy="1016400"/>
+          </a:xfrm>
+          <a:prstGeom prst="roundRect">
+            <a:avLst>
+              <a:gd name="adj" fmla="val 8000"/>
+            </a:avLst>
+          </a:prstGeom>
+          <a:solidFill>
+            <a:srgbClr val="222A35"/>
+          </a:solidFill>
+          <a:ln>
+            <a:noFill/>
+          </a:ln>
+          <a:effectLst/>
+        </p:spPr>
+        <p:style>
+          <a:lnRef idx="1">
+            <a:schemeClr val="accent1"/>
+          </a:lnRef>
+          <a:fillRef idx="3">
+            <a:schemeClr val="accent1"/>
+          </a:fillRef>
+          <a:effectRef idx="2">
+            <a:schemeClr val="accent1"/>
+          </a:effectRef>
+          <a:fontRef idx="minor">
+            <a:schemeClr val="lt1"/>
+          </a:fontRef>
+        </p:style>
+        <p:txBody>
+          <a:bodyPr rtlCol="0" anchor="ctr" wrap="square" lIns="90000" rIns="90000" tIns="40000" bIns="40000"/>
+          <a:lstStyle/>
+          <a:p>
+            <a:pPr algn="ctr"/>
+          </a:p>
+        </p:txBody>
+      </p:sp>
+      <p:sp>
+        <p:nvSpPr>
+          <p:cNvPr id="56" name="TextBox 55"/>
+          <p:cNvSpPr txBox="1"/>
+          <p:nvPr/>
+        </p:nvSpPr>
+        <p:spPr>
+          <a:xfrm>
+            <a:off x="742920" y="5615000"/>
             <a:ext cx="10706160" cy="250000"/>
           </a:xfrm>
           <a:prstGeom prst="rect">
@@ -5440,14 +5788,14 @@
       </p:sp>
       <p:sp>
         <p:nvSpPr>
-          <p:cNvPr id="49" name="TextBox 48"/>
+          <p:cNvPr id="57" name="TextBox 56"/>
           <p:cNvSpPr txBox="1"/>
           <p:nvPr/>
         </p:nvSpPr>
         <p:spPr>
           <a:xfrm>
-            <a:off x="742920" y="5958000"/>
-            <a:ext cx="10706160" cy="444500"/>
+            <a:off x="742920" y="5925000"/>
+            <a:ext cx="10706160" cy="406400"/>
           </a:xfrm>
           <a:prstGeom prst="rect">
             <a:avLst/>
@@ -5462,17 +5810,17 @@
           <a:p>
             <a:pPr algn="l">
               <a:lnSpc>
-                <a:spcPts val="1750"/>
+                <a:spcPts val="1600"/>
               </a:lnSpc>
             </a:pPr>
             <a:r>
-              <a:rPr sz="1200" b="0" i="0">
+              <a:rPr sz="1100" b="0" i="0">
                 <a:solidFill>
                   <a:srgbClr val="C8D2DC"/>
                 </a:solidFill>
                 <a:latin typeface="Arial"/>
               </a:rPr>
-              <a:t>Every layer has an entrenched owner except one — joining a machine reading to the batch it belongs to, at a price a $10–100M plant can pay. Whether that gap is a business depends on what the decision costs today without it, which no vendor publishes.</a:t>
+              <a:t>Rows 4 and 5 are solved and commoditised. Row 6 exists only inside enterprise systems. The unsolved cell is the join between rows 4 and 6 — making a reading mean “batch 4471, line 2, shift B” at a price a $10–100M plant can pay.</a:t>
             </a:r>
           </a:p>
         </p:txBody>
